--- a/docs/pptx/whole/ritu-linsubhr-ratio-throm2.pptx
+++ b/docs/pptx/whole/ritu-linsubhr-ratio-throm2.pptx
@@ -2443,7 +2443,7 @@
           </p:nvSpPr>
           <p:spPr>
             <a:xfrm>
-              <a:off x="1424129" y="2073503"/>
+              <a:off x="1425728" y="2073503"/>
               <a:ext cx="0" cy="3649639"/>
             </a:xfrm>
             <a:custGeom>
@@ -2486,7 +2486,7 @@
           </p:nvSpPr>
           <p:spPr>
             <a:xfrm>
-              <a:off x="3298684" y="2073503"/>
+              <a:off x="3298283" y="2073503"/>
               <a:ext cx="0" cy="3649639"/>
             </a:xfrm>
             <a:custGeom>
@@ -2529,7 +2529,7 @@
           </p:nvSpPr>
           <p:spPr>
             <a:xfrm>
-              <a:off x="5173239" y="2073503"/>
+              <a:off x="5170839" y="2073503"/>
               <a:ext cx="0" cy="3649639"/>
             </a:xfrm>
             <a:custGeom>
@@ -2572,7 +2572,7 @@
           </p:nvSpPr>
           <p:spPr>
             <a:xfrm>
-              <a:off x="7047795" y="2073503"/>
+              <a:off x="7043395" y="2073503"/>
               <a:ext cx="0" cy="3649639"/>
             </a:xfrm>
             <a:custGeom>
@@ -2830,7 +2830,7 @@
           </p:nvSpPr>
           <p:spPr>
             <a:xfrm>
-              <a:off x="2361407" y="2073503"/>
+              <a:off x="2362006" y="2073503"/>
               <a:ext cx="0" cy="3649639"/>
             </a:xfrm>
             <a:custGeom>
@@ -2873,7 +2873,7 @@
           </p:nvSpPr>
           <p:spPr>
             <a:xfrm>
-              <a:off x="4235962" y="2073503"/>
+              <a:off x="4234561" y="2073503"/>
               <a:ext cx="0" cy="3649639"/>
             </a:xfrm>
             <a:custGeom>
@@ -2916,7 +2916,7 @@
           </p:nvSpPr>
           <p:spPr>
             <a:xfrm>
-              <a:off x="6110517" y="2073503"/>
+              <a:off x="6107117" y="2073503"/>
               <a:ext cx="0" cy="3649639"/>
             </a:xfrm>
             <a:custGeom>
@@ -2959,7 +2959,7 @@
           </p:nvSpPr>
           <p:spPr>
             <a:xfrm>
-              <a:off x="7985072" y="2073503"/>
+              <a:off x="7979673" y="2073503"/>
               <a:ext cx="0" cy="3649639"/>
             </a:xfrm>
             <a:custGeom>
@@ -3003,584 +3003,584 @@
           <p:spPr>
             <a:xfrm>
               <a:off x="1172049" y="2073503"/>
-              <a:ext cx="7090630" cy="3401332"/>
+              <a:ext cx="7090630" cy="3401354"/>
             </a:xfrm>
             <a:custGeom>
               <a:avLst/>
               <a:pathLst>
-                <a:path w="7090630" h="3401332">
+                <a:path w="7090630" h="3401354">
                   <a:moveTo>
-                    <a:pt x="687603" y="0"/>
+                    <a:pt x="688300" y="0"/>
                   </a:moveTo>
                   <a:lnTo>
-                    <a:pt x="716225" y="58539"/>
-                  </a:lnTo>
-                  <a:lnTo>
-                    <a:pt x="787847" y="199018"/>
-                  </a:lnTo>
-                  <a:lnTo>
-                    <a:pt x="859470" y="333736"/>
-                  </a:lnTo>
-                  <a:lnTo>
-                    <a:pt x="931092" y="462928"/>
-                  </a:lnTo>
-                  <a:lnTo>
-                    <a:pt x="1002715" y="586822"/>
-                  </a:lnTo>
-                  <a:lnTo>
-                    <a:pt x="1074337" y="705635"/>
-                  </a:lnTo>
-                  <a:lnTo>
-                    <a:pt x="1145960" y="819574"/>
-                  </a:lnTo>
-                  <a:lnTo>
-                    <a:pt x="1217582" y="928841"/>
-                  </a:lnTo>
-                  <a:lnTo>
-                    <a:pt x="1289205" y="1033626"/>
-                  </a:lnTo>
-                  <a:lnTo>
-                    <a:pt x="1360827" y="1134114"/>
-                  </a:lnTo>
-                  <a:lnTo>
-                    <a:pt x="1432450" y="1230480"/>
-                  </a:lnTo>
-                  <a:lnTo>
-                    <a:pt x="1504073" y="1322894"/>
-                  </a:lnTo>
-                  <a:lnTo>
-                    <a:pt x="1575695" y="1411518"/>
-                  </a:lnTo>
-                  <a:lnTo>
-                    <a:pt x="1647318" y="1496507"/>
-                  </a:lnTo>
-                  <a:lnTo>
-                    <a:pt x="1718940" y="1578010"/>
-                  </a:lnTo>
-                  <a:lnTo>
-                    <a:pt x="1790563" y="1656171"/>
-                  </a:lnTo>
-                  <a:lnTo>
-                    <a:pt x="1862185" y="1731126"/>
-                  </a:lnTo>
-                  <a:lnTo>
-                    <a:pt x="1933808" y="1803007"/>
-                  </a:lnTo>
-                  <a:lnTo>
-                    <a:pt x="2005430" y="1871939"/>
-                  </a:lnTo>
-                  <a:lnTo>
-                    <a:pt x="2077053" y="1938045"/>
-                  </a:lnTo>
-                  <a:lnTo>
-                    <a:pt x="2148675" y="2001439"/>
-                  </a:lnTo>
-                  <a:lnTo>
-                    <a:pt x="2220298" y="2062234"/>
-                  </a:lnTo>
-                  <a:lnTo>
-                    <a:pt x="2291920" y="2120535"/>
-                  </a:lnTo>
-                  <a:lnTo>
-                    <a:pt x="2363543" y="2176444"/>
-                  </a:lnTo>
-                  <a:lnTo>
-                    <a:pt x="2435165" y="2230061"/>
-                  </a:lnTo>
-                  <a:lnTo>
-                    <a:pt x="2506788" y="2281479"/>
-                  </a:lnTo>
-                  <a:lnTo>
-                    <a:pt x="2578410" y="2330788"/>
-                  </a:lnTo>
-                  <a:lnTo>
-                    <a:pt x="2650033" y="2378075"/>
-                  </a:lnTo>
-                  <a:lnTo>
-                    <a:pt x="2721655" y="2423422"/>
-                  </a:lnTo>
-                  <a:lnTo>
-                    <a:pt x="2793278" y="2466909"/>
-                  </a:lnTo>
-                  <a:lnTo>
-                    <a:pt x="2864901" y="2508613"/>
-                  </a:lnTo>
-                  <a:lnTo>
-                    <a:pt x="2936523" y="2548607"/>
-                  </a:lnTo>
-                  <a:lnTo>
-                    <a:pt x="3008146" y="2586960"/>
-                  </a:lnTo>
-                  <a:lnTo>
-                    <a:pt x="3079768" y="2623740"/>
-                  </a:lnTo>
-                  <a:lnTo>
-                    <a:pt x="3151391" y="2653158"/>
-                  </a:lnTo>
-                  <a:lnTo>
-                    <a:pt x="3223013" y="2644872"/>
-                  </a:lnTo>
-                  <a:lnTo>
-                    <a:pt x="3294636" y="2636503"/>
-                  </a:lnTo>
-                  <a:lnTo>
-                    <a:pt x="3366258" y="2628051"/>
-                  </a:lnTo>
-                  <a:lnTo>
-                    <a:pt x="3437881" y="2619514"/>
-                  </a:lnTo>
-                  <a:lnTo>
-                    <a:pt x="3509503" y="2610893"/>
-                  </a:lnTo>
-                  <a:lnTo>
-                    <a:pt x="3581126" y="2602185"/>
-                  </a:lnTo>
-                  <a:lnTo>
-                    <a:pt x="3652748" y="2593390"/>
-                  </a:lnTo>
-                  <a:lnTo>
-                    <a:pt x="3724371" y="2584508"/>
-                  </a:lnTo>
-                  <a:lnTo>
-                    <a:pt x="3795993" y="2575537"/>
-                  </a:lnTo>
-                  <a:lnTo>
-                    <a:pt x="3867616" y="2566477"/>
-                  </a:lnTo>
-                  <a:lnTo>
-                    <a:pt x="3939238" y="2557326"/>
-                  </a:lnTo>
-                  <a:lnTo>
-                    <a:pt x="4010861" y="2548084"/>
-                  </a:lnTo>
-                  <a:lnTo>
-                    <a:pt x="4082483" y="2538749"/>
-                  </a:lnTo>
-                  <a:lnTo>
-                    <a:pt x="4154106" y="2529322"/>
-                  </a:lnTo>
-                  <a:lnTo>
-                    <a:pt x="4225729" y="2519800"/>
-                  </a:lnTo>
-                  <a:lnTo>
-                    <a:pt x="4297351" y="2510184"/>
-                  </a:lnTo>
-                  <a:lnTo>
-                    <a:pt x="4368974" y="2500472"/>
-                  </a:lnTo>
-                  <a:lnTo>
-                    <a:pt x="4440596" y="2490662"/>
-                  </a:lnTo>
-                  <a:lnTo>
-                    <a:pt x="4512219" y="2480755"/>
-                  </a:lnTo>
-                  <a:lnTo>
-                    <a:pt x="4583841" y="2470749"/>
-                  </a:lnTo>
-                  <a:lnTo>
-                    <a:pt x="4655464" y="2460643"/>
-                  </a:lnTo>
-                  <a:lnTo>
-                    <a:pt x="4727086" y="2450437"/>
-                  </a:lnTo>
-                  <a:lnTo>
-                    <a:pt x="4798709" y="2440128"/>
-                  </a:lnTo>
-                  <a:lnTo>
-                    <a:pt x="4870331" y="2429717"/>
-                  </a:lnTo>
-                  <a:lnTo>
-                    <a:pt x="4941954" y="2419202"/>
-                  </a:lnTo>
-                  <a:lnTo>
-                    <a:pt x="5013576" y="2408582"/>
-                  </a:lnTo>
-                  <a:lnTo>
-                    <a:pt x="5085199" y="2397856"/>
-                  </a:lnTo>
-                  <a:lnTo>
-                    <a:pt x="5156821" y="2387023"/>
-                  </a:lnTo>
-                  <a:lnTo>
-                    <a:pt x="5228444" y="2376082"/>
-                  </a:lnTo>
-                  <a:lnTo>
-                    <a:pt x="5300066" y="2365031"/>
-                  </a:lnTo>
-                  <a:lnTo>
-                    <a:pt x="5371689" y="2353871"/>
-                  </a:lnTo>
-                  <a:lnTo>
-                    <a:pt x="5443311" y="2342599"/>
-                  </a:lnTo>
-                  <a:lnTo>
-                    <a:pt x="5514934" y="2331215"/>
-                  </a:lnTo>
-                  <a:lnTo>
-                    <a:pt x="5586557" y="2319717"/>
-                  </a:lnTo>
-                  <a:lnTo>
-                    <a:pt x="5658179" y="2308104"/>
-                  </a:lnTo>
-                  <a:lnTo>
-                    <a:pt x="5729802" y="2296376"/>
-                  </a:lnTo>
-                  <a:lnTo>
-                    <a:pt x="5801424" y="2284531"/>
-                  </a:lnTo>
-                  <a:lnTo>
-                    <a:pt x="5873047" y="2272567"/>
-                  </a:lnTo>
-                  <a:lnTo>
-                    <a:pt x="5944669" y="2260484"/>
-                  </a:lnTo>
-                  <a:lnTo>
-                    <a:pt x="6016292" y="2248281"/>
-                  </a:lnTo>
-                  <a:lnTo>
-                    <a:pt x="6087914" y="2235955"/>
-                  </a:lnTo>
-                  <a:lnTo>
-                    <a:pt x="6159537" y="2223507"/>
-                  </a:lnTo>
-                  <a:lnTo>
-                    <a:pt x="6231159" y="2210935"/>
-                  </a:lnTo>
-                  <a:lnTo>
-                    <a:pt x="6302782" y="2198237"/>
-                  </a:lnTo>
-                  <a:lnTo>
-                    <a:pt x="6374404" y="2185413"/>
-                  </a:lnTo>
-                  <a:lnTo>
-                    <a:pt x="6446027" y="2172460"/>
-                  </a:lnTo>
-                  <a:lnTo>
-                    <a:pt x="6517649" y="2159379"/>
-                  </a:lnTo>
-                  <a:lnTo>
-                    <a:pt x="6589272" y="2146167"/>
-                  </a:lnTo>
-                  <a:lnTo>
-                    <a:pt x="6660894" y="2132823"/>
-                  </a:lnTo>
-                  <a:lnTo>
-                    <a:pt x="6732517" y="2119346"/>
-                  </a:lnTo>
-                  <a:lnTo>
-                    <a:pt x="6804139" y="2105734"/>
-                  </a:lnTo>
-                  <a:lnTo>
-                    <a:pt x="6875762" y="2091987"/>
-                  </a:lnTo>
-                  <a:lnTo>
-                    <a:pt x="6947385" y="2078103"/>
-                  </a:lnTo>
-                  <a:lnTo>
-                    <a:pt x="7019007" y="2064080"/>
-                  </a:lnTo>
-                  <a:lnTo>
-                    <a:pt x="7090630" y="2049917"/>
-                  </a:lnTo>
-                  <a:lnTo>
-                    <a:pt x="7090630" y="3401332"/>
-                  </a:lnTo>
-                  <a:lnTo>
-                    <a:pt x="7019007" y="3397807"/>
-                  </a:lnTo>
-                  <a:lnTo>
-                    <a:pt x="6947385" y="3394131"/>
-                  </a:lnTo>
-                  <a:lnTo>
-                    <a:pt x="6875762" y="3390299"/>
-                  </a:lnTo>
-                  <a:lnTo>
-                    <a:pt x="6804139" y="3386302"/>
-                  </a:lnTo>
-                  <a:lnTo>
-                    <a:pt x="6732517" y="3382135"/>
-                  </a:lnTo>
-                  <a:lnTo>
-                    <a:pt x="6660894" y="3377789"/>
-                  </a:lnTo>
-                  <a:lnTo>
-                    <a:pt x="6589272" y="3373258"/>
-                  </a:lnTo>
-                  <a:lnTo>
-                    <a:pt x="6517649" y="3368533"/>
-                  </a:lnTo>
-                  <a:lnTo>
-                    <a:pt x="6446027" y="3363605"/>
-                  </a:lnTo>
-                  <a:lnTo>
-                    <a:pt x="6374404" y="3358467"/>
-                  </a:lnTo>
-                  <a:lnTo>
-                    <a:pt x="6302782" y="3353109"/>
-                  </a:lnTo>
-                  <a:lnTo>
-                    <a:pt x="6231159" y="3347522"/>
-                  </a:lnTo>
-                  <a:lnTo>
-                    <a:pt x="6159537" y="3341696"/>
-                  </a:lnTo>
-                  <a:lnTo>
-                    <a:pt x="6087914" y="3335621"/>
-                  </a:lnTo>
-                  <a:lnTo>
-                    <a:pt x="6016292" y="3329286"/>
-                  </a:lnTo>
-                  <a:lnTo>
-                    <a:pt x="5944669" y="3322680"/>
-                  </a:lnTo>
-                  <a:lnTo>
-                    <a:pt x="5873047" y="3315792"/>
-                  </a:lnTo>
-                  <a:lnTo>
-                    <a:pt x="5801424" y="3308609"/>
-                  </a:lnTo>
-                  <a:lnTo>
-                    <a:pt x="5729802" y="3301119"/>
-                  </a:lnTo>
-                  <a:lnTo>
-                    <a:pt x="5658179" y="3293308"/>
-                  </a:lnTo>
-                  <a:lnTo>
-                    <a:pt x="5586557" y="3285164"/>
-                  </a:lnTo>
-                  <a:lnTo>
-                    <a:pt x="5514934" y="3276671"/>
-                  </a:lnTo>
-                  <a:lnTo>
-                    <a:pt x="5443311" y="3267815"/>
-                  </a:lnTo>
-                  <a:lnTo>
-                    <a:pt x="5371689" y="3258580"/>
-                  </a:lnTo>
-                  <a:lnTo>
-                    <a:pt x="5300066" y="3248950"/>
-                  </a:lnTo>
-                  <a:lnTo>
-                    <a:pt x="5228444" y="3238909"/>
-                  </a:lnTo>
-                  <a:lnTo>
-                    <a:pt x="5156821" y="3228437"/>
-                  </a:lnTo>
-                  <a:lnTo>
-                    <a:pt x="5085199" y="3217519"/>
-                  </a:lnTo>
-                  <a:lnTo>
-                    <a:pt x="5013576" y="3206133"/>
-                  </a:lnTo>
-                  <a:lnTo>
-                    <a:pt x="4941954" y="3194260"/>
-                  </a:lnTo>
-                  <a:lnTo>
-                    <a:pt x="4870331" y="3181879"/>
-                  </a:lnTo>
-                  <a:lnTo>
-                    <a:pt x="4798709" y="3168969"/>
-                  </a:lnTo>
-                  <a:lnTo>
-                    <a:pt x="4727086" y="3155507"/>
-                  </a:lnTo>
-                  <a:lnTo>
-                    <a:pt x="4655464" y="3141469"/>
-                  </a:lnTo>
-                  <a:lnTo>
-                    <a:pt x="4583841" y="3126831"/>
+                    <a:pt x="716225" y="57147"/>
+                  </a:lnTo>
+                  <a:lnTo>
+                    <a:pt x="787847" y="197709"/>
+                  </a:lnTo>
+                  <a:lnTo>
+                    <a:pt x="859470" y="332504"/>
+                  </a:lnTo>
+                  <a:lnTo>
+                    <a:pt x="931092" y="461770"/>
+                  </a:lnTo>
+                  <a:lnTo>
+                    <a:pt x="1002715" y="585734"/>
+                  </a:lnTo>
+                  <a:lnTo>
+                    <a:pt x="1074337" y="704612"/>
+                  </a:lnTo>
+                  <a:lnTo>
+                    <a:pt x="1145960" y="818614"/>
+                  </a:lnTo>
+                  <a:lnTo>
+                    <a:pt x="1217582" y="927939"/>
+                  </a:lnTo>
+                  <a:lnTo>
+                    <a:pt x="1289205" y="1032780"/>
+                  </a:lnTo>
+                  <a:lnTo>
+                    <a:pt x="1360827" y="1133320"/>
+                  </a:lnTo>
+                  <a:lnTo>
+                    <a:pt x="1432450" y="1229736"/>
+                  </a:lnTo>
+                  <a:lnTo>
+                    <a:pt x="1504073" y="1322197"/>
+                  </a:lnTo>
+                  <a:lnTo>
+                    <a:pt x="1575695" y="1410866"/>
+                  </a:lnTo>
+                  <a:lnTo>
+                    <a:pt x="1647318" y="1495896"/>
+                  </a:lnTo>
+                  <a:lnTo>
+                    <a:pt x="1718940" y="1577439"/>
+                  </a:lnTo>
+                  <a:lnTo>
+                    <a:pt x="1790563" y="1655637"/>
+                  </a:lnTo>
+                  <a:lnTo>
+                    <a:pt x="1862185" y="1730628"/>
+                  </a:lnTo>
+                  <a:lnTo>
+                    <a:pt x="1933808" y="1802542"/>
+                  </a:lnTo>
+                  <a:lnTo>
+                    <a:pt x="2005430" y="1871506"/>
+                  </a:lnTo>
+                  <a:lnTo>
+                    <a:pt x="2077053" y="1937641"/>
+                  </a:lnTo>
+                  <a:lnTo>
+                    <a:pt x="2148675" y="2001063"/>
+                  </a:lnTo>
+                  <a:lnTo>
+                    <a:pt x="2220298" y="2061884"/>
+                  </a:lnTo>
+                  <a:lnTo>
+                    <a:pt x="2291920" y="2120210"/>
+                  </a:lnTo>
+                  <a:lnTo>
+                    <a:pt x="2363543" y="2176143"/>
+                  </a:lnTo>
+                  <a:lnTo>
+                    <a:pt x="2435165" y="2229781"/>
+                  </a:lnTo>
+                  <a:lnTo>
+                    <a:pt x="2506788" y="2281220"/>
+                  </a:lnTo>
+                  <a:lnTo>
+                    <a:pt x="2578410" y="2330548"/>
+                  </a:lnTo>
+                  <a:lnTo>
+                    <a:pt x="2650033" y="2377853"/>
+                  </a:lnTo>
+                  <a:lnTo>
+                    <a:pt x="2721655" y="2423218"/>
+                  </a:lnTo>
+                  <a:lnTo>
+                    <a:pt x="2793278" y="2466721"/>
+                  </a:lnTo>
+                  <a:lnTo>
+                    <a:pt x="2864901" y="2508440"/>
+                  </a:lnTo>
+                  <a:lnTo>
+                    <a:pt x="2936523" y="2548448"/>
+                  </a:lnTo>
+                  <a:lnTo>
+                    <a:pt x="3008146" y="2586815"/>
+                  </a:lnTo>
+                  <a:lnTo>
+                    <a:pt x="3079768" y="2623607"/>
+                  </a:lnTo>
+                  <a:lnTo>
+                    <a:pt x="3151391" y="2653160"/>
+                  </a:lnTo>
+                  <a:lnTo>
+                    <a:pt x="3223013" y="2644669"/>
+                  </a:lnTo>
+                  <a:lnTo>
+                    <a:pt x="3294636" y="2636091"/>
+                  </a:lnTo>
+                  <a:lnTo>
+                    <a:pt x="3366258" y="2627426"/>
+                  </a:lnTo>
+                  <a:lnTo>
+                    <a:pt x="3437881" y="2618672"/>
+                  </a:lnTo>
+                  <a:lnTo>
+                    <a:pt x="3509503" y="2609829"/>
+                  </a:lnTo>
+                  <a:lnTo>
+                    <a:pt x="3581126" y="2600895"/>
+                  </a:lnTo>
+                  <a:lnTo>
+                    <a:pt x="3652748" y="2591869"/>
+                  </a:lnTo>
+                  <a:lnTo>
+                    <a:pt x="3724371" y="2582752"/>
+                  </a:lnTo>
+                  <a:lnTo>
+                    <a:pt x="3795993" y="2573541"/>
+                  </a:lnTo>
+                  <a:lnTo>
+                    <a:pt x="3867616" y="2564236"/>
+                  </a:lnTo>
+                  <a:lnTo>
+                    <a:pt x="3939238" y="2554837"/>
+                  </a:lnTo>
+                  <a:lnTo>
+                    <a:pt x="4010861" y="2545340"/>
+                  </a:lnTo>
+                  <a:lnTo>
+                    <a:pt x="4082483" y="2535747"/>
+                  </a:lnTo>
+                  <a:lnTo>
+                    <a:pt x="4154106" y="2526056"/>
+                  </a:lnTo>
+                  <a:lnTo>
+                    <a:pt x="4225729" y="2516266"/>
+                  </a:lnTo>
+                  <a:lnTo>
+                    <a:pt x="4297351" y="2506375"/>
+                  </a:lnTo>
+                  <a:lnTo>
+                    <a:pt x="4368974" y="2496384"/>
+                  </a:lnTo>
+                  <a:lnTo>
+                    <a:pt x="4440596" y="2486290"/>
+                  </a:lnTo>
+                  <a:lnTo>
+                    <a:pt x="4512219" y="2476094"/>
+                  </a:lnTo>
+                  <a:lnTo>
+                    <a:pt x="4583841" y="2465793"/>
+                  </a:lnTo>
+                  <a:lnTo>
+                    <a:pt x="4655464" y="2455386"/>
+                  </a:lnTo>
+                  <a:lnTo>
+                    <a:pt x="4727086" y="2444874"/>
+                  </a:lnTo>
+                  <a:lnTo>
+                    <a:pt x="4798709" y="2434253"/>
+                  </a:lnTo>
+                  <a:lnTo>
+                    <a:pt x="4870331" y="2423525"/>
+                  </a:lnTo>
+                  <a:lnTo>
+                    <a:pt x="4941954" y="2412686"/>
+                  </a:lnTo>
+                  <a:lnTo>
+                    <a:pt x="5013576" y="2401737"/>
+                  </a:lnTo>
+                  <a:lnTo>
+                    <a:pt x="5085199" y="2390676"/>
+                  </a:lnTo>
+                  <a:lnTo>
+                    <a:pt x="5156821" y="2379502"/>
+                  </a:lnTo>
+                  <a:lnTo>
+                    <a:pt x="5228444" y="2368213"/>
+                  </a:lnTo>
+                  <a:lnTo>
+                    <a:pt x="5300066" y="2356809"/>
+                  </a:lnTo>
+                  <a:lnTo>
+                    <a:pt x="5371689" y="2345289"/>
+                  </a:lnTo>
+                  <a:lnTo>
+                    <a:pt x="5443311" y="2333651"/>
+                  </a:lnTo>
+                  <a:lnTo>
+                    <a:pt x="5514934" y="2321893"/>
+                  </a:lnTo>
+                  <a:lnTo>
+                    <a:pt x="5586557" y="2310016"/>
+                  </a:lnTo>
+                  <a:lnTo>
+                    <a:pt x="5658179" y="2298017"/>
+                  </a:lnTo>
+                  <a:lnTo>
+                    <a:pt x="5729802" y="2285896"/>
+                  </a:lnTo>
+                  <a:lnTo>
+                    <a:pt x="5801424" y="2273650"/>
+                  </a:lnTo>
+                  <a:lnTo>
+                    <a:pt x="5873047" y="2261280"/>
+                  </a:lnTo>
+                  <a:lnTo>
+                    <a:pt x="5944669" y="2248783"/>
+                  </a:lnTo>
+                  <a:lnTo>
+                    <a:pt x="6016292" y="2236158"/>
+                  </a:lnTo>
+                  <a:lnTo>
+                    <a:pt x="6087914" y="2223404"/>
+                  </a:lnTo>
+                  <a:lnTo>
+                    <a:pt x="6159537" y="2210520"/>
+                  </a:lnTo>
+                  <a:lnTo>
+                    <a:pt x="6231159" y="2197504"/>
+                  </a:lnTo>
+                  <a:lnTo>
+                    <a:pt x="6302782" y="2184355"/>
+                  </a:lnTo>
+                  <a:lnTo>
+                    <a:pt x="6374404" y="2171072"/>
+                  </a:lnTo>
+                  <a:lnTo>
+                    <a:pt x="6446027" y="2157652"/>
+                  </a:lnTo>
+                  <a:lnTo>
+                    <a:pt x="6517649" y="2144096"/>
+                  </a:lnTo>
+                  <a:lnTo>
+                    <a:pt x="6589272" y="2130401"/>
+                  </a:lnTo>
+                  <a:lnTo>
+                    <a:pt x="6660894" y="2116566"/>
+                  </a:lnTo>
+                  <a:lnTo>
+                    <a:pt x="6732517" y="2102590"/>
+                  </a:lnTo>
+                  <a:lnTo>
+                    <a:pt x="6804139" y="2088470"/>
+                  </a:lnTo>
+                  <a:lnTo>
+                    <a:pt x="6875762" y="2074207"/>
+                  </a:lnTo>
+                  <a:lnTo>
+                    <a:pt x="6947385" y="2059797"/>
+                  </a:lnTo>
+                  <a:lnTo>
+                    <a:pt x="7019007" y="2045241"/>
+                  </a:lnTo>
+                  <a:lnTo>
+                    <a:pt x="7090630" y="2030535"/>
+                  </a:lnTo>
+                  <a:lnTo>
+                    <a:pt x="7090630" y="3401354"/>
+                  </a:lnTo>
+                  <a:lnTo>
+                    <a:pt x="7019007" y="3397830"/>
+                  </a:lnTo>
+                  <a:lnTo>
+                    <a:pt x="6947385" y="3394155"/>
+                  </a:lnTo>
+                  <a:lnTo>
+                    <a:pt x="6875762" y="3390322"/>
+                  </a:lnTo>
+                  <a:lnTo>
+                    <a:pt x="6804139" y="3386326"/>
+                  </a:lnTo>
+                  <a:lnTo>
+                    <a:pt x="6732517" y="3382159"/>
+                  </a:lnTo>
+                  <a:lnTo>
+                    <a:pt x="6660894" y="3377813"/>
+                  </a:lnTo>
+                  <a:lnTo>
+                    <a:pt x="6589272" y="3373282"/>
+                  </a:lnTo>
+                  <a:lnTo>
+                    <a:pt x="6517649" y="3368557"/>
+                  </a:lnTo>
+                  <a:lnTo>
+                    <a:pt x="6446027" y="3363630"/>
+                  </a:lnTo>
+                  <a:lnTo>
+                    <a:pt x="6374404" y="3358492"/>
+                  </a:lnTo>
+                  <a:lnTo>
+                    <a:pt x="6302782" y="3353134"/>
+                  </a:lnTo>
+                  <a:lnTo>
+                    <a:pt x="6231159" y="3347547"/>
+                  </a:lnTo>
+                  <a:lnTo>
+                    <a:pt x="6159537" y="3341721"/>
+                  </a:lnTo>
+                  <a:lnTo>
+                    <a:pt x="6087914" y="3335646"/>
+                  </a:lnTo>
+                  <a:lnTo>
+                    <a:pt x="6016292" y="3329311"/>
+                  </a:lnTo>
+                  <a:lnTo>
+                    <a:pt x="5944669" y="3322705"/>
+                  </a:lnTo>
+                  <a:lnTo>
+                    <a:pt x="5873047" y="3315816"/>
+                  </a:lnTo>
+                  <a:lnTo>
+                    <a:pt x="5801424" y="3308633"/>
+                  </a:lnTo>
+                  <a:lnTo>
+                    <a:pt x="5729802" y="3301142"/>
+                  </a:lnTo>
+                  <a:lnTo>
+                    <a:pt x="5658179" y="3293331"/>
+                  </a:lnTo>
+                  <a:lnTo>
+                    <a:pt x="5586557" y="3285186"/>
+                  </a:lnTo>
+                  <a:lnTo>
+                    <a:pt x="5514934" y="3276693"/>
+                  </a:lnTo>
+                  <a:lnTo>
+                    <a:pt x="5443311" y="3267836"/>
+                  </a:lnTo>
+                  <a:lnTo>
+                    <a:pt x="5371689" y="3258600"/>
+                  </a:lnTo>
+                  <a:lnTo>
+                    <a:pt x="5300066" y="3248969"/>
+                  </a:lnTo>
+                  <a:lnTo>
+                    <a:pt x="5228444" y="3238927"/>
+                  </a:lnTo>
+                  <a:lnTo>
+                    <a:pt x="5156821" y="3228454"/>
+                  </a:lnTo>
+                  <a:lnTo>
+                    <a:pt x="5085199" y="3217534"/>
+                  </a:lnTo>
+                  <a:lnTo>
+                    <a:pt x="5013576" y="3206147"/>
+                  </a:lnTo>
+                  <a:lnTo>
+                    <a:pt x="4941954" y="3194273"/>
+                  </a:lnTo>
+                  <a:lnTo>
+                    <a:pt x="4870331" y="3181890"/>
+                  </a:lnTo>
+                  <a:lnTo>
+                    <a:pt x="4798709" y="3168978"/>
+                  </a:lnTo>
+                  <a:lnTo>
+                    <a:pt x="4727086" y="3155514"/>
+                  </a:lnTo>
+                  <a:lnTo>
+                    <a:pt x="4655464" y="3141474"/>
+                  </a:lnTo>
+                  <a:lnTo>
+                    <a:pt x="4583841" y="3126833"/>
                   </a:lnTo>
                   <a:lnTo>
                     <a:pt x="4512219" y="3111566"/>
                   </a:lnTo>
                   <a:lnTo>
-                    <a:pt x="4440596" y="3095649"/>
-                  </a:lnTo>
-                  <a:lnTo>
-                    <a:pt x="4368974" y="3079051"/>
-                  </a:lnTo>
-                  <a:lnTo>
-                    <a:pt x="4297351" y="3061744"/>
-                  </a:lnTo>
-                  <a:lnTo>
-                    <a:pt x="4225729" y="3043696"/>
-                  </a:lnTo>
-                  <a:lnTo>
-                    <a:pt x="4154106" y="3024876"/>
-                  </a:lnTo>
-                  <a:lnTo>
-                    <a:pt x="4082483" y="3005251"/>
-                  </a:lnTo>
-                  <a:lnTo>
-                    <a:pt x="4010861" y="2984787"/>
-                  </a:lnTo>
-                  <a:lnTo>
-                    <a:pt x="3939238" y="2963448"/>
-                  </a:lnTo>
-                  <a:lnTo>
-                    <a:pt x="3867616" y="2941196"/>
-                  </a:lnTo>
-                  <a:lnTo>
-                    <a:pt x="3795993" y="2917993"/>
-                  </a:lnTo>
-                  <a:lnTo>
-                    <a:pt x="3724371" y="2893797"/>
-                  </a:lnTo>
-                  <a:lnTo>
-                    <a:pt x="3652748" y="2868566"/>
-                  </a:lnTo>
-                  <a:lnTo>
-                    <a:pt x="3581126" y="2842257"/>
-                  </a:lnTo>
-                  <a:lnTo>
-                    <a:pt x="3509503" y="2814822"/>
-                  </a:lnTo>
-                  <a:lnTo>
-                    <a:pt x="3437881" y="2786214"/>
-                  </a:lnTo>
-                  <a:lnTo>
-                    <a:pt x="3366258" y="2756382"/>
-                  </a:lnTo>
-                  <a:lnTo>
-                    <a:pt x="3294636" y="2725275"/>
-                  </a:lnTo>
-                  <a:lnTo>
-                    <a:pt x="3223013" y="2692837"/>
-                  </a:lnTo>
-                  <a:lnTo>
-                    <a:pt x="3151391" y="2659012"/>
-                  </a:lnTo>
-                  <a:lnTo>
-                    <a:pt x="3079768" y="2661362"/>
-                  </a:lnTo>
-                  <a:lnTo>
-                    <a:pt x="3008146" y="2669485"/>
-                  </a:lnTo>
-                  <a:lnTo>
-                    <a:pt x="2936523" y="2677528"/>
-                  </a:lnTo>
-                  <a:lnTo>
-                    <a:pt x="2864901" y="2685492"/>
-                  </a:lnTo>
-                  <a:lnTo>
-                    <a:pt x="2793278" y="2693377"/>
-                  </a:lnTo>
-                  <a:lnTo>
-                    <a:pt x="2721655" y="2701184"/>
-                  </a:lnTo>
-                  <a:lnTo>
-                    <a:pt x="2650033" y="2708913"/>
-                  </a:lnTo>
-                  <a:lnTo>
-                    <a:pt x="2578410" y="2716567"/>
-                  </a:lnTo>
-                  <a:lnTo>
-                    <a:pt x="2506788" y="2724145"/>
-                  </a:lnTo>
-                  <a:lnTo>
-                    <a:pt x="2435165" y="2731648"/>
-                  </a:lnTo>
-                  <a:lnTo>
-                    <a:pt x="2363543" y="2739077"/>
-                  </a:lnTo>
-                  <a:lnTo>
-                    <a:pt x="2291920" y="2746432"/>
-                  </a:lnTo>
-                  <a:lnTo>
-                    <a:pt x="2220298" y="2753715"/>
-                  </a:lnTo>
-                  <a:lnTo>
-                    <a:pt x="2148675" y="2760926"/>
-                  </a:lnTo>
-                  <a:lnTo>
-                    <a:pt x="2077053" y="2768066"/>
-                  </a:lnTo>
-                  <a:lnTo>
-                    <a:pt x="2005430" y="2775135"/>
-                  </a:lnTo>
-                  <a:lnTo>
-                    <a:pt x="1933808" y="2782135"/>
-                  </a:lnTo>
-                  <a:lnTo>
-                    <a:pt x="1862185" y="2789065"/>
-                  </a:lnTo>
-                  <a:lnTo>
-                    <a:pt x="1790563" y="2795927"/>
-                  </a:lnTo>
-                  <a:lnTo>
-                    <a:pt x="1718940" y="2802721"/>
-                  </a:lnTo>
-                  <a:lnTo>
-                    <a:pt x="1647318" y="2809448"/>
-                  </a:lnTo>
-                  <a:lnTo>
-                    <a:pt x="1575695" y="2816108"/>
-                  </a:lnTo>
-                  <a:lnTo>
-                    <a:pt x="1504073" y="2822703"/>
-                  </a:lnTo>
-                  <a:lnTo>
-                    <a:pt x="1432450" y="2829232"/>
-                  </a:lnTo>
-                  <a:lnTo>
-                    <a:pt x="1360827" y="2835697"/>
-                  </a:lnTo>
-                  <a:lnTo>
-                    <a:pt x="1289205" y="2842099"/>
-                  </a:lnTo>
-                  <a:lnTo>
-                    <a:pt x="1217582" y="2848436"/>
-                  </a:lnTo>
-                  <a:lnTo>
-                    <a:pt x="1145960" y="2854712"/>
-                  </a:lnTo>
-                  <a:lnTo>
-                    <a:pt x="1074337" y="2860925"/>
-                  </a:lnTo>
-                  <a:lnTo>
-                    <a:pt x="1002715" y="2867077"/>
-                  </a:lnTo>
-                  <a:lnTo>
-                    <a:pt x="931092" y="2873168"/>
-                  </a:lnTo>
-                  <a:lnTo>
-                    <a:pt x="859470" y="2879199"/>
-                  </a:lnTo>
-                  <a:lnTo>
-                    <a:pt x="787847" y="2885171"/>
-                  </a:lnTo>
-                  <a:lnTo>
-                    <a:pt x="716225" y="2891083"/>
-                  </a:lnTo>
-                  <a:lnTo>
-                    <a:pt x="644602" y="2896938"/>
-                  </a:lnTo>
-                  <a:lnTo>
-                    <a:pt x="572980" y="2902734"/>
-                  </a:lnTo>
-                  <a:lnTo>
-                    <a:pt x="501357" y="2908473"/>
-                  </a:lnTo>
-                  <a:lnTo>
-                    <a:pt x="429735" y="2914155"/>
-                  </a:lnTo>
-                  <a:lnTo>
-                    <a:pt x="358112" y="2919781"/>
-                  </a:lnTo>
-                  <a:lnTo>
-                    <a:pt x="286490" y="2925352"/>
-                  </a:lnTo>
-                  <a:lnTo>
-                    <a:pt x="214867" y="2930868"/>
-                  </a:lnTo>
-                  <a:lnTo>
-                    <a:pt x="143245" y="2936329"/>
-                  </a:lnTo>
-                  <a:lnTo>
-                    <a:pt x="71622" y="2941736"/>
-                  </a:lnTo>
-                  <a:lnTo>
-                    <a:pt x="0" y="2947090"/>
+                    <a:pt x="4440596" y="3095646"/>
+                  </a:lnTo>
+                  <a:lnTo>
+                    <a:pt x="4368974" y="3079044"/>
+                  </a:lnTo>
+                  <a:lnTo>
+                    <a:pt x="4297351" y="3061733"/>
+                  </a:lnTo>
+                  <a:lnTo>
+                    <a:pt x="4225729" y="3043681"/>
+                  </a:lnTo>
+                  <a:lnTo>
+                    <a:pt x="4154106" y="3024858"/>
+                  </a:lnTo>
+                  <a:lnTo>
+                    <a:pt x="4082483" y="3005228"/>
+                  </a:lnTo>
+                  <a:lnTo>
+                    <a:pt x="4010861" y="2984760"/>
+                  </a:lnTo>
+                  <a:lnTo>
+                    <a:pt x="3939238" y="2963415"/>
+                  </a:lnTo>
+                  <a:lnTo>
+                    <a:pt x="3867616" y="2941158"/>
+                  </a:lnTo>
+                  <a:lnTo>
+                    <a:pt x="3795993" y="2917949"/>
+                  </a:lnTo>
+                  <a:lnTo>
+                    <a:pt x="3724371" y="2893746"/>
+                  </a:lnTo>
+                  <a:lnTo>
+                    <a:pt x="3652748" y="2868509"/>
+                  </a:lnTo>
+                  <a:lnTo>
+                    <a:pt x="3581126" y="2842192"/>
+                  </a:lnTo>
+                  <a:lnTo>
+                    <a:pt x="3509503" y="2814749"/>
+                  </a:lnTo>
+                  <a:lnTo>
+                    <a:pt x="3437881" y="2786133"/>
+                  </a:lnTo>
+                  <a:lnTo>
+                    <a:pt x="3366258" y="2756292"/>
+                  </a:lnTo>
+                  <a:lnTo>
+                    <a:pt x="3294636" y="2725175"/>
+                  </a:lnTo>
+                  <a:lnTo>
+                    <a:pt x="3223013" y="2692727"/>
+                  </a:lnTo>
+                  <a:lnTo>
+                    <a:pt x="3151391" y="2658891"/>
+                  </a:lnTo>
+                  <a:lnTo>
+                    <a:pt x="3079768" y="2661565"/>
+                  </a:lnTo>
+                  <a:lnTo>
+                    <a:pt x="3008146" y="2669885"/>
+                  </a:lnTo>
+                  <a:lnTo>
+                    <a:pt x="2936523" y="2678121"/>
+                  </a:lnTo>
+                  <a:lnTo>
+                    <a:pt x="2864901" y="2686273"/>
+                  </a:lnTo>
+                  <a:lnTo>
+                    <a:pt x="2793278" y="2694343"/>
+                  </a:lnTo>
+                  <a:lnTo>
+                    <a:pt x="2721655" y="2702331"/>
+                  </a:lnTo>
+                  <a:lnTo>
+                    <a:pt x="2650033" y="2710239"/>
+                  </a:lnTo>
+                  <a:lnTo>
+                    <a:pt x="2578410" y="2718066"/>
+                  </a:lnTo>
+                  <a:lnTo>
+                    <a:pt x="2506788" y="2725814"/>
+                  </a:lnTo>
+                  <a:lnTo>
+                    <a:pt x="2435165" y="2733484"/>
+                  </a:lnTo>
+                  <a:lnTo>
+                    <a:pt x="2363543" y="2741076"/>
+                  </a:lnTo>
+                  <a:lnTo>
+                    <a:pt x="2291920" y="2748592"/>
+                  </a:lnTo>
+                  <a:lnTo>
+                    <a:pt x="2220298" y="2756031"/>
+                  </a:lnTo>
+                  <a:lnTo>
+                    <a:pt x="2148675" y="2763395"/>
+                  </a:lnTo>
+                  <a:lnTo>
+                    <a:pt x="2077053" y="2770684"/>
+                  </a:lnTo>
+                  <a:lnTo>
+                    <a:pt x="2005430" y="2777900"/>
+                  </a:lnTo>
+                  <a:lnTo>
+                    <a:pt x="1933808" y="2785043"/>
+                  </a:lnTo>
+                  <a:lnTo>
+                    <a:pt x="1862185" y="2792113"/>
+                  </a:lnTo>
+                  <a:lnTo>
+                    <a:pt x="1790563" y="2799112"/>
+                  </a:lnTo>
+                  <a:lnTo>
+                    <a:pt x="1718940" y="2806040"/>
+                  </a:lnTo>
+                  <a:lnTo>
+                    <a:pt x="1647318" y="2812898"/>
+                  </a:lnTo>
+                  <a:lnTo>
+                    <a:pt x="1575695" y="2819687"/>
+                  </a:lnTo>
+                  <a:lnTo>
+                    <a:pt x="1504073" y="2826406"/>
+                  </a:lnTo>
+                  <a:lnTo>
+                    <a:pt x="1432450" y="2833058"/>
+                  </a:lnTo>
+                  <a:lnTo>
+                    <a:pt x="1360827" y="2839643"/>
+                  </a:lnTo>
+                  <a:lnTo>
+                    <a:pt x="1289205" y="2846161"/>
+                  </a:lnTo>
+                  <a:lnTo>
+                    <a:pt x="1217582" y="2852613"/>
+                  </a:lnTo>
+                  <a:lnTo>
+                    <a:pt x="1145960" y="2858999"/>
+                  </a:lnTo>
+                  <a:lnTo>
+                    <a:pt x="1074337" y="2865321"/>
+                  </a:lnTo>
+                  <a:lnTo>
+                    <a:pt x="1002715" y="2871579"/>
+                  </a:lnTo>
+                  <a:lnTo>
+                    <a:pt x="931092" y="2877774"/>
+                  </a:lnTo>
+                  <a:lnTo>
+                    <a:pt x="859470" y="2883906"/>
+                  </a:lnTo>
+                  <a:lnTo>
+                    <a:pt x="787847" y="2889976"/>
+                  </a:lnTo>
+                  <a:lnTo>
+                    <a:pt x="716225" y="2895985"/>
+                  </a:lnTo>
+                  <a:lnTo>
+                    <a:pt x="644602" y="2901933"/>
+                  </a:lnTo>
+                  <a:lnTo>
+                    <a:pt x="572980" y="2907820"/>
+                  </a:lnTo>
+                  <a:lnTo>
+                    <a:pt x="501357" y="2913648"/>
+                  </a:lnTo>
+                  <a:lnTo>
+                    <a:pt x="429735" y="2919417"/>
+                  </a:lnTo>
+                  <a:lnTo>
+                    <a:pt x="358112" y="2925128"/>
+                  </a:lnTo>
+                  <a:lnTo>
+                    <a:pt x="286490" y="2930781"/>
+                  </a:lnTo>
+                  <a:lnTo>
+                    <a:pt x="214867" y="2936376"/>
+                  </a:lnTo>
+                  <a:lnTo>
+                    <a:pt x="143245" y="2941915"/>
+                  </a:lnTo>
+                  <a:lnTo>
+                    <a:pt x="71622" y="2947398"/>
+                  </a:lnTo>
+                  <a:lnTo>
+                    <a:pt x="0" y="2952826"/>
                   </a:lnTo>
                   <a:close/>
                 </a:path>
@@ -3606,285 +3606,285 @@
           </p:nvSpPr>
           <p:spPr>
             <a:xfrm>
-              <a:off x="1859652" y="2073503"/>
-              <a:ext cx="6403026" cy="2653158"/>
+              <a:off x="1860349" y="2073503"/>
+              <a:ext cx="6402329" cy="2653160"/>
             </a:xfrm>
             <a:custGeom>
               <a:avLst/>
               <a:pathLst>
-                <a:path w="6403026" h="2653158">
+                <a:path w="6402329" h="2653160">
                   <a:moveTo>
                     <a:pt x="0" y="0"/>
                   </a:moveTo>
                   <a:lnTo>
-                    <a:pt x="28622" y="58539"/>
-                  </a:lnTo>
-                  <a:lnTo>
-                    <a:pt x="100244" y="199018"/>
-                  </a:lnTo>
-                  <a:lnTo>
-                    <a:pt x="171867" y="333736"/>
-                  </a:lnTo>
-                  <a:lnTo>
-                    <a:pt x="243489" y="462928"/>
-                  </a:lnTo>
-                  <a:lnTo>
-                    <a:pt x="315112" y="586822"/>
-                  </a:lnTo>
-                  <a:lnTo>
-                    <a:pt x="386734" y="705635"/>
-                  </a:lnTo>
-                  <a:lnTo>
-                    <a:pt x="458357" y="819574"/>
-                  </a:lnTo>
-                  <a:lnTo>
-                    <a:pt x="529979" y="928841"/>
-                  </a:lnTo>
-                  <a:lnTo>
-                    <a:pt x="601602" y="1033626"/>
-                  </a:lnTo>
-                  <a:lnTo>
-                    <a:pt x="673224" y="1134114"/>
-                  </a:lnTo>
-                  <a:lnTo>
-                    <a:pt x="744847" y="1230480"/>
-                  </a:lnTo>
-                  <a:lnTo>
-                    <a:pt x="816469" y="1322894"/>
-                  </a:lnTo>
-                  <a:lnTo>
-                    <a:pt x="888092" y="1411518"/>
-                  </a:lnTo>
-                  <a:lnTo>
-                    <a:pt x="959714" y="1496507"/>
-                  </a:lnTo>
-                  <a:lnTo>
-                    <a:pt x="1031337" y="1578010"/>
-                  </a:lnTo>
-                  <a:lnTo>
-                    <a:pt x="1102959" y="1656171"/>
-                  </a:lnTo>
-                  <a:lnTo>
-                    <a:pt x="1174582" y="1731126"/>
-                  </a:lnTo>
-                  <a:lnTo>
-                    <a:pt x="1246205" y="1803007"/>
-                  </a:lnTo>
-                  <a:lnTo>
-                    <a:pt x="1317827" y="1871939"/>
-                  </a:lnTo>
-                  <a:lnTo>
-                    <a:pt x="1389450" y="1938045"/>
-                  </a:lnTo>
-                  <a:lnTo>
-                    <a:pt x="1461072" y="2001439"/>
-                  </a:lnTo>
-                  <a:lnTo>
-                    <a:pt x="1532695" y="2062234"/>
-                  </a:lnTo>
-                  <a:lnTo>
-                    <a:pt x="1604317" y="2120535"/>
-                  </a:lnTo>
-                  <a:lnTo>
-                    <a:pt x="1675940" y="2176444"/>
-                  </a:lnTo>
-                  <a:lnTo>
-                    <a:pt x="1747562" y="2230061"/>
-                  </a:lnTo>
-                  <a:lnTo>
-                    <a:pt x="1819185" y="2281479"/>
-                  </a:lnTo>
-                  <a:lnTo>
-                    <a:pt x="1890807" y="2330788"/>
-                  </a:lnTo>
-                  <a:lnTo>
-                    <a:pt x="1962430" y="2378075"/>
-                  </a:lnTo>
-                  <a:lnTo>
-                    <a:pt x="2034052" y="2423422"/>
-                  </a:lnTo>
-                  <a:lnTo>
-                    <a:pt x="2105675" y="2466909"/>
-                  </a:lnTo>
-                  <a:lnTo>
-                    <a:pt x="2177297" y="2508613"/>
-                  </a:lnTo>
-                  <a:lnTo>
-                    <a:pt x="2248920" y="2548607"/>
-                  </a:lnTo>
-                  <a:lnTo>
-                    <a:pt x="2320542" y="2586960"/>
-                  </a:lnTo>
-                  <a:lnTo>
-                    <a:pt x="2392165" y="2623740"/>
-                  </a:lnTo>
-                  <a:lnTo>
-                    <a:pt x="2463787" y="2653158"/>
-                  </a:lnTo>
-                  <a:lnTo>
-                    <a:pt x="2535410" y="2644872"/>
-                  </a:lnTo>
-                  <a:lnTo>
-                    <a:pt x="2607033" y="2636503"/>
-                  </a:lnTo>
-                  <a:lnTo>
-                    <a:pt x="2678655" y="2628051"/>
-                  </a:lnTo>
-                  <a:lnTo>
-                    <a:pt x="2750278" y="2619514"/>
-                  </a:lnTo>
-                  <a:lnTo>
-                    <a:pt x="2821900" y="2610893"/>
-                  </a:lnTo>
-                  <a:lnTo>
-                    <a:pt x="2893523" y="2602185"/>
-                  </a:lnTo>
-                  <a:lnTo>
-                    <a:pt x="2965145" y="2593390"/>
-                  </a:lnTo>
-                  <a:lnTo>
-                    <a:pt x="3036768" y="2584508"/>
-                  </a:lnTo>
-                  <a:lnTo>
-                    <a:pt x="3108390" y="2575537"/>
-                  </a:lnTo>
-                  <a:lnTo>
-                    <a:pt x="3180013" y="2566477"/>
-                  </a:lnTo>
-                  <a:lnTo>
-                    <a:pt x="3251635" y="2557326"/>
-                  </a:lnTo>
-                  <a:lnTo>
-                    <a:pt x="3323258" y="2548084"/>
-                  </a:lnTo>
-                  <a:lnTo>
-                    <a:pt x="3394880" y="2538749"/>
-                  </a:lnTo>
-                  <a:lnTo>
-                    <a:pt x="3466503" y="2529322"/>
-                  </a:lnTo>
-                  <a:lnTo>
-                    <a:pt x="3538125" y="2519800"/>
-                  </a:lnTo>
-                  <a:lnTo>
-                    <a:pt x="3609748" y="2510184"/>
-                  </a:lnTo>
-                  <a:lnTo>
-                    <a:pt x="3681370" y="2500472"/>
-                  </a:lnTo>
-                  <a:lnTo>
-                    <a:pt x="3752993" y="2490662"/>
-                  </a:lnTo>
-                  <a:lnTo>
-                    <a:pt x="3824615" y="2480755"/>
-                  </a:lnTo>
-                  <a:lnTo>
-                    <a:pt x="3896238" y="2470749"/>
-                  </a:lnTo>
-                  <a:lnTo>
-                    <a:pt x="3967861" y="2460643"/>
-                  </a:lnTo>
-                  <a:lnTo>
-                    <a:pt x="4039483" y="2450437"/>
-                  </a:lnTo>
-                  <a:lnTo>
-                    <a:pt x="4111106" y="2440128"/>
-                  </a:lnTo>
-                  <a:lnTo>
-                    <a:pt x="4182728" y="2429717"/>
-                  </a:lnTo>
-                  <a:lnTo>
-                    <a:pt x="4254351" y="2419202"/>
-                  </a:lnTo>
-                  <a:lnTo>
-                    <a:pt x="4325973" y="2408582"/>
-                  </a:lnTo>
-                  <a:lnTo>
-                    <a:pt x="4397596" y="2397856"/>
-                  </a:lnTo>
-                  <a:lnTo>
-                    <a:pt x="4469218" y="2387023"/>
-                  </a:lnTo>
-                  <a:lnTo>
-                    <a:pt x="4540841" y="2376082"/>
-                  </a:lnTo>
-                  <a:lnTo>
-                    <a:pt x="4612463" y="2365031"/>
-                  </a:lnTo>
-                  <a:lnTo>
-                    <a:pt x="4684086" y="2353871"/>
-                  </a:lnTo>
-                  <a:lnTo>
-                    <a:pt x="4755708" y="2342599"/>
-                  </a:lnTo>
-                  <a:lnTo>
-                    <a:pt x="4827331" y="2331215"/>
-                  </a:lnTo>
-                  <a:lnTo>
-                    <a:pt x="4898953" y="2319717"/>
-                  </a:lnTo>
-                  <a:lnTo>
-                    <a:pt x="4970576" y="2308104"/>
-                  </a:lnTo>
-                  <a:lnTo>
-                    <a:pt x="5042198" y="2296376"/>
-                  </a:lnTo>
-                  <a:lnTo>
-                    <a:pt x="5113821" y="2284531"/>
-                  </a:lnTo>
-                  <a:lnTo>
-                    <a:pt x="5185443" y="2272567"/>
-                  </a:lnTo>
-                  <a:lnTo>
-                    <a:pt x="5257066" y="2260484"/>
-                  </a:lnTo>
-                  <a:lnTo>
-                    <a:pt x="5328689" y="2248281"/>
-                  </a:lnTo>
-                  <a:lnTo>
-                    <a:pt x="5400311" y="2235955"/>
-                  </a:lnTo>
-                  <a:lnTo>
-                    <a:pt x="5471934" y="2223507"/>
-                  </a:lnTo>
-                  <a:lnTo>
-                    <a:pt x="5543556" y="2210935"/>
-                  </a:lnTo>
-                  <a:lnTo>
-                    <a:pt x="5615179" y="2198237"/>
-                  </a:lnTo>
-                  <a:lnTo>
-                    <a:pt x="5686801" y="2185413"/>
-                  </a:lnTo>
-                  <a:lnTo>
-                    <a:pt x="5758424" y="2172460"/>
-                  </a:lnTo>
-                  <a:lnTo>
-                    <a:pt x="5830046" y="2159379"/>
-                  </a:lnTo>
-                  <a:lnTo>
-                    <a:pt x="5901669" y="2146167"/>
-                  </a:lnTo>
-                  <a:lnTo>
-                    <a:pt x="5973291" y="2132823"/>
-                  </a:lnTo>
-                  <a:lnTo>
-                    <a:pt x="6044914" y="2119346"/>
-                  </a:lnTo>
-                  <a:lnTo>
-                    <a:pt x="6116536" y="2105734"/>
-                  </a:lnTo>
-                  <a:lnTo>
-                    <a:pt x="6188159" y="2091987"/>
-                  </a:lnTo>
-                  <a:lnTo>
-                    <a:pt x="6259781" y="2078103"/>
-                  </a:lnTo>
-                  <a:lnTo>
-                    <a:pt x="6331404" y="2064080"/>
-                  </a:lnTo>
-                  <a:lnTo>
-                    <a:pt x="6403026" y="2049917"/>
+                    <a:pt x="27924" y="57147"/>
+                  </a:lnTo>
+                  <a:lnTo>
+                    <a:pt x="99547" y="197709"/>
+                  </a:lnTo>
+                  <a:lnTo>
+                    <a:pt x="171170" y="332504"/>
+                  </a:lnTo>
+                  <a:lnTo>
+                    <a:pt x="242792" y="461770"/>
+                  </a:lnTo>
+                  <a:lnTo>
+                    <a:pt x="314415" y="585734"/>
+                  </a:lnTo>
+                  <a:lnTo>
+                    <a:pt x="386037" y="704612"/>
+                  </a:lnTo>
+                  <a:lnTo>
+                    <a:pt x="457660" y="818614"/>
+                  </a:lnTo>
+                  <a:lnTo>
+                    <a:pt x="529282" y="927939"/>
+                  </a:lnTo>
+                  <a:lnTo>
+                    <a:pt x="600905" y="1032780"/>
+                  </a:lnTo>
+                  <a:lnTo>
+                    <a:pt x="672527" y="1133320"/>
+                  </a:lnTo>
+                  <a:lnTo>
+                    <a:pt x="744150" y="1229736"/>
+                  </a:lnTo>
+                  <a:lnTo>
+                    <a:pt x="815772" y="1322197"/>
+                  </a:lnTo>
+                  <a:lnTo>
+                    <a:pt x="887395" y="1410866"/>
+                  </a:lnTo>
+                  <a:lnTo>
+                    <a:pt x="959017" y="1495896"/>
+                  </a:lnTo>
+                  <a:lnTo>
+                    <a:pt x="1030640" y="1577439"/>
+                  </a:lnTo>
+                  <a:lnTo>
+                    <a:pt x="1102262" y="1655637"/>
+                  </a:lnTo>
+                  <a:lnTo>
+                    <a:pt x="1173885" y="1730628"/>
+                  </a:lnTo>
+                  <a:lnTo>
+                    <a:pt x="1245507" y="1802542"/>
+                  </a:lnTo>
+                  <a:lnTo>
+                    <a:pt x="1317130" y="1871506"/>
+                  </a:lnTo>
+                  <a:lnTo>
+                    <a:pt x="1388752" y="1937641"/>
+                  </a:lnTo>
+                  <a:lnTo>
+                    <a:pt x="1460375" y="2001063"/>
+                  </a:lnTo>
+                  <a:lnTo>
+                    <a:pt x="1531998" y="2061884"/>
+                  </a:lnTo>
+                  <a:lnTo>
+                    <a:pt x="1603620" y="2120210"/>
+                  </a:lnTo>
+                  <a:lnTo>
+                    <a:pt x="1675243" y="2176143"/>
+                  </a:lnTo>
+                  <a:lnTo>
+                    <a:pt x="1746865" y="2229781"/>
+                  </a:lnTo>
+                  <a:lnTo>
+                    <a:pt x="1818488" y="2281220"/>
+                  </a:lnTo>
+                  <a:lnTo>
+                    <a:pt x="1890110" y="2330548"/>
+                  </a:lnTo>
+                  <a:lnTo>
+                    <a:pt x="1961733" y="2377853"/>
+                  </a:lnTo>
+                  <a:lnTo>
+                    <a:pt x="2033355" y="2423218"/>
+                  </a:lnTo>
+                  <a:lnTo>
+                    <a:pt x="2104978" y="2466721"/>
+                  </a:lnTo>
+                  <a:lnTo>
+                    <a:pt x="2176600" y="2508440"/>
+                  </a:lnTo>
+                  <a:lnTo>
+                    <a:pt x="2248223" y="2548448"/>
+                  </a:lnTo>
+                  <a:lnTo>
+                    <a:pt x="2319845" y="2586815"/>
+                  </a:lnTo>
+                  <a:lnTo>
+                    <a:pt x="2391468" y="2623607"/>
+                  </a:lnTo>
+                  <a:lnTo>
+                    <a:pt x="2463090" y="2653160"/>
+                  </a:lnTo>
+                  <a:lnTo>
+                    <a:pt x="2534713" y="2644669"/>
+                  </a:lnTo>
+                  <a:lnTo>
+                    <a:pt x="2606335" y="2636091"/>
+                  </a:lnTo>
+                  <a:lnTo>
+                    <a:pt x="2677958" y="2627426"/>
+                  </a:lnTo>
+                  <a:lnTo>
+                    <a:pt x="2749580" y="2618672"/>
+                  </a:lnTo>
+                  <a:lnTo>
+                    <a:pt x="2821203" y="2609829"/>
+                  </a:lnTo>
+                  <a:lnTo>
+                    <a:pt x="2892826" y="2600895"/>
+                  </a:lnTo>
+                  <a:lnTo>
+                    <a:pt x="2964448" y="2591869"/>
+                  </a:lnTo>
+                  <a:lnTo>
+                    <a:pt x="3036071" y="2582752"/>
+                  </a:lnTo>
+                  <a:lnTo>
+                    <a:pt x="3107693" y="2573541"/>
+                  </a:lnTo>
+                  <a:lnTo>
+                    <a:pt x="3179316" y="2564236"/>
+                  </a:lnTo>
+                  <a:lnTo>
+                    <a:pt x="3250938" y="2554837"/>
+                  </a:lnTo>
+                  <a:lnTo>
+                    <a:pt x="3322561" y="2545340"/>
+                  </a:lnTo>
+                  <a:lnTo>
+                    <a:pt x="3394183" y="2535747"/>
+                  </a:lnTo>
+                  <a:lnTo>
+                    <a:pt x="3465806" y="2526056"/>
+                  </a:lnTo>
+                  <a:lnTo>
+                    <a:pt x="3537428" y="2516266"/>
+                  </a:lnTo>
+                  <a:lnTo>
+                    <a:pt x="3609051" y="2506375"/>
+                  </a:lnTo>
+                  <a:lnTo>
+                    <a:pt x="3680673" y="2496384"/>
+                  </a:lnTo>
+                  <a:lnTo>
+                    <a:pt x="3752296" y="2486290"/>
+                  </a:lnTo>
+                  <a:lnTo>
+                    <a:pt x="3823918" y="2476094"/>
+                  </a:lnTo>
+                  <a:lnTo>
+                    <a:pt x="3895541" y="2465793"/>
+                  </a:lnTo>
+                  <a:lnTo>
+                    <a:pt x="3967163" y="2455386"/>
+                  </a:lnTo>
+                  <a:lnTo>
+                    <a:pt x="4038786" y="2444874"/>
+                  </a:lnTo>
+                  <a:lnTo>
+                    <a:pt x="4110408" y="2434253"/>
+                  </a:lnTo>
+                  <a:lnTo>
+                    <a:pt x="4182031" y="2423525"/>
+                  </a:lnTo>
+                  <a:lnTo>
+                    <a:pt x="4253654" y="2412686"/>
+                  </a:lnTo>
+                  <a:lnTo>
+                    <a:pt x="4325276" y="2401737"/>
+                  </a:lnTo>
+                  <a:lnTo>
+                    <a:pt x="4396899" y="2390676"/>
+                  </a:lnTo>
+                  <a:lnTo>
+                    <a:pt x="4468521" y="2379502"/>
+                  </a:lnTo>
+                  <a:lnTo>
+                    <a:pt x="4540144" y="2368213"/>
+                  </a:lnTo>
+                  <a:lnTo>
+                    <a:pt x="4611766" y="2356809"/>
+                  </a:lnTo>
+                  <a:lnTo>
+                    <a:pt x="4683389" y="2345289"/>
+                  </a:lnTo>
+                  <a:lnTo>
+                    <a:pt x="4755011" y="2333651"/>
+                  </a:lnTo>
+                  <a:lnTo>
+                    <a:pt x="4826634" y="2321893"/>
+                  </a:lnTo>
+                  <a:lnTo>
+                    <a:pt x="4898256" y="2310016"/>
+                  </a:lnTo>
+                  <a:lnTo>
+                    <a:pt x="4969879" y="2298017"/>
+                  </a:lnTo>
+                  <a:lnTo>
+                    <a:pt x="5041501" y="2285896"/>
+                  </a:lnTo>
+                  <a:lnTo>
+                    <a:pt x="5113124" y="2273650"/>
+                  </a:lnTo>
+                  <a:lnTo>
+                    <a:pt x="5184746" y="2261280"/>
+                  </a:lnTo>
+                  <a:lnTo>
+                    <a:pt x="5256369" y="2248783"/>
+                  </a:lnTo>
+                  <a:lnTo>
+                    <a:pt x="5327991" y="2236158"/>
+                  </a:lnTo>
+                  <a:lnTo>
+                    <a:pt x="5399614" y="2223404"/>
+                  </a:lnTo>
+                  <a:lnTo>
+                    <a:pt x="5471236" y="2210520"/>
+                  </a:lnTo>
+                  <a:lnTo>
+                    <a:pt x="5542859" y="2197504"/>
+                  </a:lnTo>
+                  <a:lnTo>
+                    <a:pt x="5614482" y="2184355"/>
+                  </a:lnTo>
+                  <a:lnTo>
+                    <a:pt x="5686104" y="2171072"/>
+                  </a:lnTo>
+                  <a:lnTo>
+                    <a:pt x="5757727" y="2157652"/>
+                  </a:lnTo>
+                  <a:lnTo>
+                    <a:pt x="5829349" y="2144096"/>
+                  </a:lnTo>
+                  <a:lnTo>
+                    <a:pt x="5900972" y="2130401"/>
+                  </a:lnTo>
+                  <a:lnTo>
+                    <a:pt x="5972594" y="2116566"/>
+                  </a:lnTo>
+                  <a:lnTo>
+                    <a:pt x="6044217" y="2102590"/>
+                  </a:lnTo>
+                  <a:lnTo>
+                    <a:pt x="6115839" y="2088470"/>
+                  </a:lnTo>
+                  <a:lnTo>
+                    <a:pt x="6187462" y="2074207"/>
+                  </a:lnTo>
+                  <a:lnTo>
+                    <a:pt x="6259084" y="2059797"/>
+                  </a:lnTo>
+                  <a:lnTo>
+                    <a:pt x="6330707" y="2045241"/>
+                  </a:lnTo>
+                  <a:lnTo>
+                    <a:pt x="6402329" y="2030535"/>
                   </a:lnTo>
                 </a:path>
               </a:pathLst>
@@ -3904,312 +3904,312 @@
           </p:nvSpPr>
           <p:spPr>
             <a:xfrm>
-              <a:off x="1172049" y="4732515"/>
-              <a:ext cx="7090630" cy="742319"/>
+              <a:off x="1172049" y="4732394"/>
+              <a:ext cx="7090630" cy="742463"/>
             </a:xfrm>
             <a:custGeom>
               <a:avLst/>
               <a:pathLst>
-                <a:path w="7090630" h="742319">
+                <a:path w="7090630" h="742463">
                   <a:moveTo>
-                    <a:pt x="7090630" y="742319"/>
+                    <a:pt x="7090630" y="742463"/>
                   </a:moveTo>
                   <a:lnTo>
-                    <a:pt x="7019007" y="738795"/>
-                  </a:lnTo>
-                  <a:lnTo>
-                    <a:pt x="6947385" y="735119"/>
-                  </a:lnTo>
-                  <a:lnTo>
-                    <a:pt x="6875762" y="731287"/>
-                  </a:lnTo>
-                  <a:lnTo>
-                    <a:pt x="6804139" y="727290"/>
-                  </a:lnTo>
-                  <a:lnTo>
-                    <a:pt x="6732517" y="723123"/>
-                  </a:lnTo>
-                  <a:lnTo>
-                    <a:pt x="6660894" y="718777"/>
-                  </a:lnTo>
-                  <a:lnTo>
-                    <a:pt x="6589272" y="714245"/>
-                  </a:lnTo>
-                  <a:lnTo>
-                    <a:pt x="6517649" y="709520"/>
-                  </a:lnTo>
-                  <a:lnTo>
-                    <a:pt x="6446027" y="704593"/>
-                  </a:lnTo>
-                  <a:lnTo>
-                    <a:pt x="6374404" y="699455"/>
-                  </a:lnTo>
-                  <a:lnTo>
-                    <a:pt x="6302782" y="694097"/>
-                  </a:lnTo>
-                  <a:lnTo>
-                    <a:pt x="6231159" y="688510"/>
-                  </a:lnTo>
-                  <a:lnTo>
-                    <a:pt x="6159537" y="682684"/>
-                  </a:lnTo>
-                  <a:lnTo>
-                    <a:pt x="6087914" y="676609"/>
-                  </a:lnTo>
-                  <a:lnTo>
-                    <a:pt x="6016292" y="670274"/>
-                  </a:lnTo>
-                  <a:lnTo>
-                    <a:pt x="5944669" y="663668"/>
-                  </a:lnTo>
-                  <a:lnTo>
-                    <a:pt x="5873047" y="656779"/>
-                  </a:lnTo>
-                  <a:lnTo>
-                    <a:pt x="5801424" y="649596"/>
-                  </a:lnTo>
-                  <a:lnTo>
-                    <a:pt x="5729802" y="642106"/>
-                  </a:lnTo>
-                  <a:lnTo>
-                    <a:pt x="5658179" y="634296"/>
-                  </a:lnTo>
-                  <a:lnTo>
-                    <a:pt x="5586557" y="626151"/>
-                  </a:lnTo>
-                  <a:lnTo>
-                    <a:pt x="5514934" y="617658"/>
-                  </a:lnTo>
-                  <a:lnTo>
-                    <a:pt x="5443311" y="608802"/>
-                  </a:lnTo>
-                  <a:lnTo>
-                    <a:pt x="5371689" y="599568"/>
-                  </a:lnTo>
-                  <a:lnTo>
-                    <a:pt x="5300066" y="589938"/>
-                  </a:lnTo>
-                  <a:lnTo>
-                    <a:pt x="5228444" y="579896"/>
-                  </a:lnTo>
-                  <a:lnTo>
-                    <a:pt x="5156821" y="569425"/>
-                  </a:lnTo>
-                  <a:lnTo>
-                    <a:pt x="5085199" y="558506"/>
-                  </a:lnTo>
-                  <a:lnTo>
-                    <a:pt x="5013576" y="547120"/>
-                  </a:lnTo>
-                  <a:lnTo>
-                    <a:pt x="4941954" y="535247"/>
-                  </a:lnTo>
-                  <a:lnTo>
-                    <a:pt x="4870331" y="522867"/>
-                  </a:lnTo>
-                  <a:lnTo>
-                    <a:pt x="4798709" y="509957"/>
-                  </a:lnTo>
-                  <a:lnTo>
-                    <a:pt x="4727086" y="496495"/>
-                  </a:lnTo>
-                  <a:lnTo>
-                    <a:pt x="4655464" y="482457"/>
-                  </a:lnTo>
-                  <a:lnTo>
-                    <a:pt x="4583841" y="467818"/>
-                  </a:lnTo>
-                  <a:lnTo>
-                    <a:pt x="4512219" y="452554"/>
-                  </a:lnTo>
-                  <a:lnTo>
-                    <a:pt x="4440596" y="436637"/>
-                  </a:lnTo>
-                  <a:lnTo>
-                    <a:pt x="4368974" y="420039"/>
-                  </a:lnTo>
-                  <a:lnTo>
-                    <a:pt x="4297351" y="402731"/>
-                  </a:lnTo>
-                  <a:lnTo>
-                    <a:pt x="4225729" y="384683"/>
-                  </a:lnTo>
-                  <a:lnTo>
-                    <a:pt x="4154106" y="365864"/>
-                  </a:lnTo>
-                  <a:lnTo>
-                    <a:pt x="4082483" y="346239"/>
-                  </a:lnTo>
-                  <a:lnTo>
-                    <a:pt x="4010861" y="325775"/>
-                  </a:lnTo>
-                  <a:lnTo>
-                    <a:pt x="3939238" y="304436"/>
-                  </a:lnTo>
-                  <a:lnTo>
-                    <a:pt x="3867616" y="282184"/>
-                  </a:lnTo>
-                  <a:lnTo>
-                    <a:pt x="3795993" y="258980"/>
-                  </a:lnTo>
-                  <a:lnTo>
-                    <a:pt x="3724371" y="234785"/>
-                  </a:lnTo>
-                  <a:lnTo>
-                    <a:pt x="3652748" y="209554"/>
-                  </a:lnTo>
-                  <a:lnTo>
-                    <a:pt x="3581126" y="183244"/>
-                  </a:lnTo>
-                  <a:lnTo>
-                    <a:pt x="3509503" y="155810"/>
-                  </a:lnTo>
-                  <a:lnTo>
-                    <a:pt x="3437881" y="127202"/>
-                  </a:lnTo>
-                  <a:lnTo>
-                    <a:pt x="3366258" y="97370"/>
-                  </a:lnTo>
-                  <a:lnTo>
-                    <a:pt x="3294636" y="66262"/>
-                  </a:lnTo>
-                  <a:lnTo>
-                    <a:pt x="3223013" y="33825"/>
+                    <a:pt x="7019007" y="738938"/>
+                  </a:lnTo>
+                  <a:lnTo>
+                    <a:pt x="6947385" y="735263"/>
+                  </a:lnTo>
+                  <a:lnTo>
+                    <a:pt x="6875762" y="731431"/>
+                  </a:lnTo>
+                  <a:lnTo>
+                    <a:pt x="6804139" y="727435"/>
+                  </a:lnTo>
+                  <a:lnTo>
+                    <a:pt x="6732517" y="723268"/>
+                  </a:lnTo>
+                  <a:lnTo>
+                    <a:pt x="6660894" y="718922"/>
+                  </a:lnTo>
+                  <a:lnTo>
+                    <a:pt x="6589272" y="714391"/>
+                  </a:lnTo>
+                  <a:lnTo>
+                    <a:pt x="6517649" y="709666"/>
+                  </a:lnTo>
+                  <a:lnTo>
+                    <a:pt x="6446027" y="704738"/>
+                  </a:lnTo>
+                  <a:lnTo>
+                    <a:pt x="6374404" y="699600"/>
+                  </a:lnTo>
+                  <a:lnTo>
+                    <a:pt x="6302782" y="694243"/>
+                  </a:lnTo>
+                  <a:lnTo>
+                    <a:pt x="6231159" y="688656"/>
+                  </a:lnTo>
+                  <a:lnTo>
+                    <a:pt x="6159537" y="682830"/>
+                  </a:lnTo>
+                  <a:lnTo>
+                    <a:pt x="6087914" y="676754"/>
+                  </a:lnTo>
+                  <a:lnTo>
+                    <a:pt x="6016292" y="670419"/>
+                  </a:lnTo>
+                  <a:lnTo>
+                    <a:pt x="5944669" y="663813"/>
+                  </a:lnTo>
+                  <a:lnTo>
+                    <a:pt x="5873047" y="656925"/>
+                  </a:lnTo>
+                  <a:lnTo>
+                    <a:pt x="5801424" y="649741"/>
+                  </a:lnTo>
+                  <a:lnTo>
+                    <a:pt x="5729802" y="642251"/>
+                  </a:lnTo>
+                  <a:lnTo>
+                    <a:pt x="5658179" y="634440"/>
+                  </a:lnTo>
+                  <a:lnTo>
+                    <a:pt x="5586557" y="626295"/>
+                  </a:lnTo>
+                  <a:lnTo>
+                    <a:pt x="5514934" y="617801"/>
+                  </a:lnTo>
+                  <a:lnTo>
+                    <a:pt x="5443311" y="608944"/>
+                  </a:lnTo>
+                  <a:lnTo>
+                    <a:pt x="5371689" y="599709"/>
+                  </a:lnTo>
+                  <a:lnTo>
+                    <a:pt x="5300066" y="590078"/>
+                  </a:lnTo>
+                  <a:lnTo>
+                    <a:pt x="5228444" y="580035"/>
+                  </a:lnTo>
+                  <a:lnTo>
+                    <a:pt x="5156821" y="569563"/>
+                  </a:lnTo>
+                  <a:lnTo>
+                    <a:pt x="5085199" y="558643"/>
+                  </a:lnTo>
+                  <a:lnTo>
+                    <a:pt x="5013576" y="547256"/>
+                  </a:lnTo>
+                  <a:lnTo>
+                    <a:pt x="4941954" y="535381"/>
+                  </a:lnTo>
+                  <a:lnTo>
+                    <a:pt x="4870331" y="522999"/>
+                  </a:lnTo>
+                  <a:lnTo>
+                    <a:pt x="4798709" y="510087"/>
+                  </a:lnTo>
+                  <a:lnTo>
+                    <a:pt x="4727086" y="496623"/>
+                  </a:lnTo>
+                  <a:lnTo>
+                    <a:pt x="4655464" y="482582"/>
+                  </a:lnTo>
+                  <a:lnTo>
+                    <a:pt x="4583841" y="467942"/>
+                  </a:lnTo>
+                  <a:lnTo>
+                    <a:pt x="4512219" y="452674"/>
+                  </a:lnTo>
+                  <a:lnTo>
+                    <a:pt x="4440596" y="436754"/>
+                  </a:lnTo>
+                  <a:lnTo>
+                    <a:pt x="4368974" y="420153"/>
+                  </a:lnTo>
+                  <a:lnTo>
+                    <a:pt x="4297351" y="402842"/>
+                  </a:lnTo>
+                  <a:lnTo>
+                    <a:pt x="4225729" y="384790"/>
+                  </a:lnTo>
+                  <a:lnTo>
+                    <a:pt x="4154106" y="365966"/>
+                  </a:lnTo>
+                  <a:lnTo>
+                    <a:pt x="4082483" y="346337"/>
+                  </a:lnTo>
+                  <a:lnTo>
+                    <a:pt x="4010861" y="325868"/>
+                  </a:lnTo>
+                  <a:lnTo>
+                    <a:pt x="3939238" y="304524"/>
+                  </a:lnTo>
+                  <a:lnTo>
+                    <a:pt x="3867616" y="282267"/>
+                  </a:lnTo>
+                  <a:lnTo>
+                    <a:pt x="3795993" y="259057"/>
+                  </a:lnTo>
+                  <a:lnTo>
+                    <a:pt x="3724371" y="234855"/>
+                  </a:lnTo>
+                  <a:lnTo>
+                    <a:pt x="3652748" y="209618"/>
+                  </a:lnTo>
+                  <a:lnTo>
+                    <a:pt x="3581126" y="183301"/>
+                  </a:lnTo>
+                  <a:lnTo>
+                    <a:pt x="3509503" y="155858"/>
+                  </a:lnTo>
+                  <a:lnTo>
+                    <a:pt x="3437881" y="127241"/>
+                  </a:lnTo>
+                  <a:lnTo>
+                    <a:pt x="3366258" y="97401"/>
+                  </a:lnTo>
+                  <a:lnTo>
+                    <a:pt x="3294636" y="66284"/>
+                  </a:lnTo>
+                  <a:lnTo>
+                    <a:pt x="3223013" y="33836"/>
                   </a:lnTo>
                   <a:lnTo>
                     <a:pt x="3151391" y="0"/>
                   </a:lnTo>
                   <a:lnTo>
-                    <a:pt x="3079768" y="2350"/>
-                  </a:lnTo>
-                  <a:lnTo>
-                    <a:pt x="3008146" y="10473"/>
-                  </a:lnTo>
-                  <a:lnTo>
-                    <a:pt x="2936523" y="18516"/>
-                  </a:lnTo>
-                  <a:lnTo>
-                    <a:pt x="2864901" y="26479"/>
-                  </a:lnTo>
-                  <a:lnTo>
-                    <a:pt x="2793278" y="34364"/>
-                  </a:lnTo>
-                  <a:lnTo>
-                    <a:pt x="2721655" y="42171"/>
-                  </a:lnTo>
-                  <a:lnTo>
-                    <a:pt x="2650033" y="49901"/>
-                  </a:lnTo>
-                  <a:lnTo>
-                    <a:pt x="2578410" y="57555"/>
-                  </a:lnTo>
-                  <a:lnTo>
-                    <a:pt x="2506788" y="65133"/>
-                  </a:lnTo>
-                  <a:lnTo>
-                    <a:pt x="2435165" y="72636"/>
-                  </a:lnTo>
-                  <a:lnTo>
-                    <a:pt x="2363543" y="80065"/>
-                  </a:lnTo>
-                  <a:lnTo>
-                    <a:pt x="2291920" y="87420"/>
-                  </a:lnTo>
-                  <a:lnTo>
-                    <a:pt x="2220298" y="94703"/>
-                  </a:lnTo>
-                  <a:lnTo>
-                    <a:pt x="2148675" y="101914"/>
-                  </a:lnTo>
-                  <a:lnTo>
-                    <a:pt x="2077053" y="109054"/>
-                  </a:lnTo>
-                  <a:lnTo>
-                    <a:pt x="2005430" y="116123"/>
-                  </a:lnTo>
-                  <a:lnTo>
-                    <a:pt x="1933808" y="123122"/>
-                  </a:lnTo>
-                  <a:lnTo>
-                    <a:pt x="1862185" y="130053"/>
-                  </a:lnTo>
-                  <a:lnTo>
-                    <a:pt x="1790563" y="136914"/>
-                  </a:lnTo>
-                  <a:lnTo>
-                    <a:pt x="1718940" y="143708"/>
-                  </a:lnTo>
-                  <a:lnTo>
-                    <a:pt x="1647318" y="150435"/>
-                  </a:lnTo>
-                  <a:lnTo>
-                    <a:pt x="1575695" y="157096"/>
-                  </a:lnTo>
-                  <a:lnTo>
-                    <a:pt x="1504073" y="163690"/>
-                  </a:lnTo>
-                  <a:lnTo>
-                    <a:pt x="1432450" y="170220"/>
-                  </a:lnTo>
-                  <a:lnTo>
-                    <a:pt x="1360827" y="176685"/>
-                  </a:lnTo>
-                  <a:lnTo>
-                    <a:pt x="1289205" y="183086"/>
-                  </a:lnTo>
-                  <a:lnTo>
-                    <a:pt x="1217582" y="189424"/>
-                  </a:lnTo>
-                  <a:lnTo>
-                    <a:pt x="1145960" y="195699"/>
-                  </a:lnTo>
-                  <a:lnTo>
-                    <a:pt x="1074337" y="201913"/>
-                  </a:lnTo>
-                  <a:lnTo>
-                    <a:pt x="1002715" y="208065"/>
-                  </a:lnTo>
-                  <a:lnTo>
-                    <a:pt x="931092" y="214156"/>
-                  </a:lnTo>
-                  <a:lnTo>
-                    <a:pt x="859470" y="220187"/>
-                  </a:lnTo>
-                  <a:lnTo>
-                    <a:pt x="787847" y="226159"/>
-                  </a:lnTo>
-                  <a:lnTo>
-                    <a:pt x="716225" y="232071"/>
-                  </a:lnTo>
-                  <a:lnTo>
-                    <a:pt x="644602" y="237925"/>
-                  </a:lnTo>
-                  <a:lnTo>
-                    <a:pt x="572980" y="243721"/>
-                  </a:lnTo>
-                  <a:lnTo>
-                    <a:pt x="501357" y="249460"/>
-                  </a:lnTo>
-                  <a:lnTo>
-                    <a:pt x="429735" y="255143"/>
-                  </a:lnTo>
-                  <a:lnTo>
-                    <a:pt x="358112" y="260769"/>
-                  </a:lnTo>
-                  <a:lnTo>
-                    <a:pt x="286490" y="266340"/>
-                  </a:lnTo>
-                  <a:lnTo>
-                    <a:pt x="214867" y="271855"/>
-                  </a:lnTo>
-                  <a:lnTo>
-                    <a:pt x="143245" y="277316"/>
-                  </a:lnTo>
-                  <a:lnTo>
-                    <a:pt x="71622" y="282723"/>
-                  </a:lnTo>
-                  <a:lnTo>
-                    <a:pt x="0" y="288077"/>
+                    <a:pt x="3079768" y="2674"/>
+                  </a:lnTo>
+                  <a:lnTo>
+                    <a:pt x="3008146" y="10994"/>
+                  </a:lnTo>
+                  <a:lnTo>
+                    <a:pt x="2936523" y="19229"/>
+                  </a:lnTo>
+                  <a:lnTo>
+                    <a:pt x="2864901" y="27382"/>
+                  </a:lnTo>
+                  <a:lnTo>
+                    <a:pt x="2793278" y="35452"/>
+                  </a:lnTo>
+                  <a:lnTo>
+                    <a:pt x="2721655" y="43440"/>
+                  </a:lnTo>
+                  <a:lnTo>
+                    <a:pt x="2650033" y="51347"/>
+                  </a:lnTo>
+                  <a:lnTo>
+                    <a:pt x="2578410" y="59175"/>
+                  </a:lnTo>
+                  <a:lnTo>
+                    <a:pt x="2506788" y="66923"/>
+                  </a:lnTo>
+                  <a:lnTo>
+                    <a:pt x="2435165" y="74593"/>
+                  </a:lnTo>
+                  <a:lnTo>
+                    <a:pt x="2363543" y="82185"/>
+                  </a:lnTo>
+                  <a:lnTo>
+                    <a:pt x="2291920" y="89700"/>
+                  </a:lnTo>
+                  <a:lnTo>
+                    <a:pt x="2220298" y="97140"/>
+                  </a:lnTo>
+                  <a:lnTo>
+                    <a:pt x="2148675" y="104504"/>
+                  </a:lnTo>
+                  <a:lnTo>
+                    <a:pt x="2077053" y="111793"/>
+                  </a:lnTo>
+                  <a:lnTo>
+                    <a:pt x="2005430" y="119009"/>
+                  </a:lnTo>
+                  <a:lnTo>
+                    <a:pt x="1933808" y="126152"/>
+                  </a:lnTo>
+                  <a:lnTo>
+                    <a:pt x="1862185" y="133222"/>
+                  </a:lnTo>
+                  <a:lnTo>
+                    <a:pt x="1790563" y="140221"/>
+                  </a:lnTo>
+                  <a:lnTo>
+                    <a:pt x="1718940" y="147149"/>
+                  </a:lnTo>
+                  <a:lnTo>
+                    <a:pt x="1647318" y="154007"/>
+                  </a:lnTo>
+                  <a:lnTo>
+                    <a:pt x="1575695" y="160795"/>
+                  </a:lnTo>
+                  <a:lnTo>
+                    <a:pt x="1504073" y="167515"/>
+                  </a:lnTo>
+                  <a:lnTo>
+                    <a:pt x="1432450" y="174167"/>
+                  </a:lnTo>
+                  <a:lnTo>
+                    <a:pt x="1360827" y="180752"/>
+                  </a:lnTo>
+                  <a:lnTo>
+                    <a:pt x="1289205" y="187270"/>
+                  </a:lnTo>
+                  <a:lnTo>
+                    <a:pt x="1217582" y="193721"/>
+                  </a:lnTo>
+                  <a:lnTo>
+                    <a:pt x="1145960" y="200108"/>
+                  </a:lnTo>
+                  <a:lnTo>
+                    <a:pt x="1074337" y="206430"/>
+                  </a:lnTo>
+                  <a:lnTo>
+                    <a:pt x="1002715" y="212688"/>
+                  </a:lnTo>
+                  <a:lnTo>
+                    <a:pt x="931092" y="218883"/>
+                  </a:lnTo>
+                  <a:lnTo>
+                    <a:pt x="859470" y="225015"/>
+                  </a:lnTo>
+                  <a:lnTo>
+                    <a:pt x="787847" y="231085"/>
+                  </a:lnTo>
+                  <a:lnTo>
+                    <a:pt x="716225" y="237094"/>
+                  </a:lnTo>
+                  <a:lnTo>
+                    <a:pt x="644602" y="243041"/>
+                  </a:lnTo>
+                  <a:lnTo>
+                    <a:pt x="572980" y="248929"/>
+                  </a:lnTo>
+                  <a:lnTo>
+                    <a:pt x="501357" y="254757"/>
+                  </a:lnTo>
+                  <a:lnTo>
+                    <a:pt x="429735" y="260526"/>
+                  </a:lnTo>
+                  <a:lnTo>
+                    <a:pt x="358112" y="266237"/>
+                  </a:lnTo>
+                  <a:lnTo>
+                    <a:pt x="286490" y="271889"/>
+                  </a:lnTo>
+                  <a:lnTo>
+                    <a:pt x="214867" y="277485"/>
+                  </a:lnTo>
+                  <a:lnTo>
+                    <a:pt x="143245" y="283024"/>
+                  </a:lnTo>
+                  <a:lnTo>
+                    <a:pt x="71622" y="288507"/>
+                  </a:lnTo>
+                  <a:lnTo>
+                    <a:pt x="0" y="293935"/>
                   </a:lnTo>
                 </a:path>
               </a:pathLst>
@@ -4229,312 +4229,312 @@
           </p:nvSpPr>
           <p:spPr>
             <a:xfrm>
-              <a:off x="1172049" y="3885663"/>
-              <a:ext cx="7090630" cy="1327829"/>
+              <a:off x="1172049" y="3894219"/>
+              <a:ext cx="7090630" cy="1317004"/>
             </a:xfrm>
             <a:custGeom>
               <a:avLst/>
               <a:pathLst>
-                <a:path w="7090630" h="1327829">
+                <a:path w="7090630" h="1317004">
                   <a:moveTo>
                     <a:pt x="0" y="0"/>
                   </a:moveTo>
                   <a:lnTo>
-                    <a:pt x="71622" y="26492"/>
-                  </a:lnTo>
-                  <a:lnTo>
-                    <a:pt x="143245" y="52565"/>
-                  </a:lnTo>
-                  <a:lnTo>
-                    <a:pt x="214867" y="78224"/>
-                  </a:lnTo>
-                  <a:lnTo>
-                    <a:pt x="286490" y="103477"/>
-                  </a:lnTo>
-                  <a:lnTo>
-                    <a:pt x="358112" y="128330"/>
-                  </a:lnTo>
-                  <a:lnTo>
-                    <a:pt x="429735" y="152788"/>
-                  </a:lnTo>
-                  <a:lnTo>
-                    <a:pt x="501357" y="176859"/>
-                  </a:lnTo>
-                  <a:lnTo>
-                    <a:pt x="572980" y="200549"/>
-                  </a:lnTo>
-                  <a:lnTo>
-                    <a:pt x="644602" y="223863"/>
-                  </a:lnTo>
-                  <a:lnTo>
-                    <a:pt x="716225" y="246808"/>
-                  </a:lnTo>
-                  <a:lnTo>
-                    <a:pt x="787847" y="269389"/>
-                  </a:lnTo>
-                  <a:lnTo>
-                    <a:pt x="859470" y="291612"/>
-                  </a:lnTo>
-                  <a:lnTo>
-                    <a:pt x="931092" y="313483"/>
-                  </a:lnTo>
-                  <a:lnTo>
-                    <a:pt x="1002715" y="335007"/>
-                  </a:lnTo>
-                  <a:lnTo>
-                    <a:pt x="1074337" y="356190"/>
-                  </a:lnTo>
-                  <a:lnTo>
-                    <a:pt x="1145960" y="377037"/>
-                  </a:lnTo>
-                  <a:lnTo>
-                    <a:pt x="1217582" y="397554"/>
-                  </a:lnTo>
-                  <a:lnTo>
-                    <a:pt x="1289205" y="417746"/>
-                  </a:lnTo>
-                  <a:lnTo>
-                    <a:pt x="1360827" y="437618"/>
-                  </a:lnTo>
-                  <a:lnTo>
-                    <a:pt x="1432450" y="457175"/>
-                  </a:lnTo>
-                  <a:lnTo>
-                    <a:pt x="1504073" y="476422"/>
-                  </a:lnTo>
-                  <a:lnTo>
-                    <a:pt x="1575695" y="495364"/>
-                  </a:lnTo>
-                  <a:lnTo>
-                    <a:pt x="1647318" y="514005"/>
-                  </a:lnTo>
-                  <a:lnTo>
-                    <a:pt x="1718940" y="532352"/>
-                  </a:lnTo>
-                  <a:lnTo>
-                    <a:pt x="1790563" y="550407"/>
-                  </a:lnTo>
-                  <a:lnTo>
-                    <a:pt x="1862185" y="568176"/>
-                  </a:lnTo>
-                  <a:lnTo>
-                    <a:pt x="1933808" y="585664"/>
-                  </a:lnTo>
-                  <a:lnTo>
-                    <a:pt x="2005430" y="602874"/>
-                  </a:lnTo>
-                  <a:lnTo>
-                    <a:pt x="2077053" y="619812"/>
-                  </a:lnTo>
-                  <a:lnTo>
-                    <a:pt x="2148675" y="636482"/>
-                  </a:lnTo>
-                  <a:lnTo>
-                    <a:pt x="2220298" y="652887"/>
-                  </a:lnTo>
-                  <a:lnTo>
-                    <a:pt x="2291920" y="669032"/>
-                  </a:lnTo>
-                  <a:lnTo>
-                    <a:pt x="2363543" y="684921"/>
-                  </a:lnTo>
-                  <a:lnTo>
-                    <a:pt x="2435165" y="700558"/>
-                  </a:lnTo>
-                  <a:lnTo>
-                    <a:pt x="2506788" y="715948"/>
-                  </a:lnTo>
-                  <a:lnTo>
-                    <a:pt x="2578410" y="731094"/>
-                  </a:lnTo>
-                  <a:lnTo>
-                    <a:pt x="2650033" y="745999"/>
-                  </a:lnTo>
-                  <a:lnTo>
-                    <a:pt x="2721655" y="760669"/>
-                  </a:lnTo>
-                  <a:lnTo>
-                    <a:pt x="2793278" y="775106"/>
-                  </a:lnTo>
-                  <a:lnTo>
-                    <a:pt x="2864901" y="789314"/>
-                  </a:lnTo>
-                  <a:lnTo>
-                    <a:pt x="2936523" y="803297"/>
-                  </a:lnTo>
-                  <a:lnTo>
-                    <a:pt x="3008146" y="817058"/>
-                  </a:lnTo>
-                  <a:lnTo>
-                    <a:pt x="3079768" y="830601"/>
-                  </a:lnTo>
-                  <a:lnTo>
-                    <a:pt x="3151391" y="843930"/>
-                  </a:lnTo>
-                  <a:lnTo>
-                    <a:pt x="3223013" y="857047"/>
-                  </a:lnTo>
-                  <a:lnTo>
-                    <a:pt x="3294636" y="869957"/>
-                  </a:lnTo>
-                  <a:lnTo>
-                    <a:pt x="3366258" y="882661"/>
-                  </a:lnTo>
-                  <a:lnTo>
-                    <a:pt x="3437881" y="895165"/>
-                  </a:lnTo>
-                  <a:lnTo>
-                    <a:pt x="3509503" y="907470"/>
-                  </a:lnTo>
-                  <a:lnTo>
-                    <a:pt x="3581126" y="919580"/>
-                  </a:lnTo>
-                  <a:lnTo>
-                    <a:pt x="3652748" y="931499"/>
-                  </a:lnTo>
-                  <a:lnTo>
-                    <a:pt x="3724371" y="943228"/>
-                  </a:lnTo>
-                  <a:lnTo>
-                    <a:pt x="3795993" y="954772"/>
-                  </a:lnTo>
-                  <a:lnTo>
-                    <a:pt x="3867616" y="966132"/>
-                  </a:lnTo>
-                  <a:lnTo>
-                    <a:pt x="3939238" y="977313"/>
-                  </a:lnTo>
-                  <a:lnTo>
-                    <a:pt x="4010861" y="988316"/>
-                  </a:lnTo>
-                  <a:lnTo>
-                    <a:pt x="4082483" y="999145"/>
-                  </a:lnTo>
-                  <a:lnTo>
-                    <a:pt x="4154106" y="1009803"/>
-                  </a:lnTo>
-                  <a:lnTo>
-                    <a:pt x="4225729" y="1020291"/>
-                  </a:lnTo>
-                  <a:lnTo>
-                    <a:pt x="4297351" y="1030613"/>
-                  </a:lnTo>
-                  <a:lnTo>
-                    <a:pt x="4368974" y="1040772"/>
-                  </a:lnTo>
-                  <a:lnTo>
-                    <a:pt x="4440596" y="1050770"/>
-                  </a:lnTo>
-                  <a:lnTo>
-                    <a:pt x="4512219" y="1060609"/>
-                  </a:lnTo>
-                  <a:lnTo>
-                    <a:pt x="4583841" y="1070292"/>
-                  </a:lnTo>
-                  <a:lnTo>
-                    <a:pt x="4655464" y="1079822"/>
-                  </a:lnTo>
-                  <a:lnTo>
-                    <a:pt x="4727086" y="1089201"/>
-                  </a:lnTo>
-                  <a:lnTo>
-                    <a:pt x="4798709" y="1098431"/>
-                  </a:lnTo>
-                  <a:lnTo>
-                    <a:pt x="4870331" y="1107514"/>
-                  </a:lnTo>
-                  <a:lnTo>
-                    <a:pt x="4941954" y="1116454"/>
-                  </a:lnTo>
-                  <a:lnTo>
-                    <a:pt x="5013576" y="1125252"/>
-                  </a:lnTo>
-                  <a:lnTo>
-                    <a:pt x="5085199" y="1133911"/>
-                  </a:lnTo>
-                  <a:lnTo>
-                    <a:pt x="5156821" y="1142433"/>
-                  </a:lnTo>
-                  <a:lnTo>
-                    <a:pt x="5228444" y="1150819"/>
-                  </a:lnTo>
-                  <a:lnTo>
-                    <a:pt x="5300066" y="1159073"/>
-                  </a:lnTo>
-                  <a:lnTo>
-                    <a:pt x="5371689" y="1167195"/>
-                  </a:lnTo>
-                  <a:lnTo>
-                    <a:pt x="5443311" y="1175189"/>
-                  </a:lnTo>
-                  <a:lnTo>
-                    <a:pt x="5514934" y="1183056"/>
-                  </a:lnTo>
-                  <a:lnTo>
-                    <a:pt x="5586557" y="1190799"/>
-                  </a:lnTo>
-                  <a:lnTo>
-                    <a:pt x="5658179" y="1198419"/>
-                  </a:lnTo>
-                  <a:lnTo>
-                    <a:pt x="5729802" y="1205918"/>
-                  </a:lnTo>
-                  <a:lnTo>
-                    <a:pt x="5801424" y="1213298"/>
-                  </a:lnTo>
-                  <a:lnTo>
-                    <a:pt x="5873047" y="1220562"/>
-                  </a:lnTo>
-                  <a:lnTo>
-                    <a:pt x="5944669" y="1227710"/>
-                  </a:lnTo>
-                  <a:lnTo>
-                    <a:pt x="6016292" y="1234745"/>
-                  </a:lnTo>
-                  <a:lnTo>
-                    <a:pt x="6087914" y="1241668"/>
-                  </a:lnTo>
-                  <a:lnTo>
-                    <a:pt x="6159537" y="1248482"/>
-                  </a:lnTo>
-                  <a:lnTo>
-                    <a:pt x="6231159" y="1255187"/>
-                  </a:lnTo>
-                  <a:lnTo>
-                    <a:pt x="6302782" y="1261787"/>
-                  </a:lnTo>
-                  <a:lnTo>
-                    <a:pt x="6374404" y="1268282"/>
-                  </a:lnTo>
-                  <a:lnTo>
-                    <a:pt x="6446027" y="1274674"/>
-                  </a:lnTo>
-                  <a:lnTo>
-                    <a:pt x="6517649" y="1280964"/>
-                  </a:lnTo>
-                  <a:lnTo>
-                    <a:pt x="6589272" y="1287155"/>
-                  </a:lnTo>
-                  <a:lnTo>
-                    <a:pt x="6660894" y="1293248"/>
-                  </a:lnTo>
-                  <a:lnTo>
-                    <a:pt x="6732517" y="1299244"/>
-                  </a:lnTo>
-                  <a:lnTo>
-                    <a:pt x="6804139" y="1305145"/>
-                  </a:lnTo>
-                  <a:lnTo>
-                    <a:pt x="6875762" y="1310953"/>
-                  </a:lnTo>
-                  <a:lnTo>
-                    <a:pt x="6947385" y="1316668"/>
-                  </a:lnTo>
-                  <a:lnTo>
-                    <a:pt x="7019007" y="1322293"/>
-                  </a:lnTo>
-                  <a:lnTo>
-                    <a:pt x="7090630" y="1327829"/>
+                    <a:pt x="71622" y="26163"/>
+                  </a:lnTo>
+                  <a:lnTo>
+                    <a:pt x="143245" y="51915"/>
+                  </a:lnTo>
+                  <a:lnTo>
+                    <a:pt x="214867" y="77261"/>
+                  </a:lnTo>
+                  <a:lnTo>
+                    <a:pt x="286490" y="102209"/>
+                  </a:lnTo>
+                  <a:lnTo>
+                    <a:pt x="358112" y="126765"/>
+                  </a:lnTo>
+                  <a:lnTo>
+                    <a:pt x="429735" y="150934"/>
+                  </a:lnTo>
+                  <a:lnTo>
+                    <a:pt x="501357" y="174722"/>
+                  </a:lnTo>
+                  <a:lnTo>
+                    <a:pt x="572980" y="198137"/>
+                  </a:lnTo>
+                  <a:lnTo>
+                    <a:pt x="644602" y="221183"/>
+                  </a:lnTo>
+                  <a:lnTo>
+                    <a:pt x="716225" y="243867"/>
+                  </a:lnTo>
+                  <a:lnTo>
+                    <a:pt x="787847" y="266194"/>
+                  </a:lnTo>
+                  <a:lnTo>
+                    <a:pt x="859470" y="288169"/>
+                  </a:lnTo>
+                  <a:lnTo>
+                    <a:pt x="931092" y="309799"/>
+                  </a:lnTo>
+                  <a:lnTo>
+                    <a:pt x="1002715" y="331088"/>
+                  </a:lnTo>
+                  <a:lnTo>
+                    <a:pt x="1074337" y="352043"/>
+                  </a:lnTo>
+                  <a:lnTo>
+                    <a:pt x="1145960" y="372668"/>
+                  </a:lnTo>
+                  <a:lnTo>
+                    <a:pt x="1217582" y="392968"/>
+                  </a:lnTo>
+                  <a:lnTo>
+                    <a:pt x="1289205" y="412949"/>
+                  </a:lnTo>
+                  <a:lnTo>
+                    <a:pt x="1360827" y="432616"/>
+                  </a:lnTo>
+                  <a:lnTo>
+                    <a:pt x="1432450" y="451973"/>
+                  </a:lnTo>
+                  <a:lnTo>
+                    <a:pt x="1504073" y="471026"/>
+                  </a:lnTo>
+                  <a:lnTo>
+                    <a:pt x="1575695" y="489779"/>
+                  </a:lnTo>
+                  <a:lnTo>
+                    <a:pt x="1647318" y="508237"/>
+                  </a:lnTo>
+                  <a:lnTo>
+                    <a:pt x="1718940" y="526405"/>
+                  </a:lnTo>
+                  <a:lnTo>
+                    <a:pt x="1790563" y="544287"/>
+                  </a:lnTo>
+                  <a:lnTo>
+                    <a:pt x="1862185" y="561887"/>
+                  </a:lnTo>
+                  <a:lnTo>
+                    <a:pt x="1933808" y="579211"/>
+                  </a:lnTo>
+                  <a:lnTo>
+                    <a:pt x="2005430" y="596262"/>
+                  </a:lnTo>
+                  <a:lnTo>
+                    <a:pt x="2077053" y="613044"/>
+                  </a:lnTo>
+                  <a:lnTo>
+                    <a:pt x="2148675" y="629563"/>
+                  </a:lnTo>
+                  <a:lnTo>
+                    <a:pt x="2220298" y="645822"/>
+                  </a:lnTo>
+                  <a:lnTo>
+                    <a:pt x="2291920" y="661825"/>
+                  </a:lnTo>
+                  <a:lnTo>
+                    <a:pt x="2363543" y="677576"/>
+                  </a:lnTo>
+                  <a:lnTo>
+                    <a:pt x="2435165" y="693080"/>
+                  </a:lnTo>
+                  <a:lnTo>
+                    <a:pt x="2506788" y="708340"/>
+                  </a:lnTo>
+                  <a:lnTo>
+                    <a:pt x="2578410" y="723359"/>
+                  </a:lnTo>
+                  <a:lnTo>
+                    <a:pt x="2650033" y="738142"/>
+                  </a:lnTo>
+                  <a:lnTo>
+                    <a:pt x="2721655" y="752693"/>
+                  </a:lnTo>
+                  <a:lnTo>
+                    <a:pt x="2793278" y="767015"/>
+                  </a:lnTo>
+                  <a:lnTo>
+                    <a:pt x="2864901" y="781111"/>
+                  </a:lnTo>
+                  <a:lnTo>
+                    <a:pt x="2936523" y="794986"/>
+                  </a:lnTo>
+                  <a:lnTo>
+                    <a:pt x="3008146" y="808642"/>
+                  </a:lnTo>
+                  <a:lnTo>
+                    <a:pt x="3079768" y="822084"/>
+                  </a:lnTo>
+                  <a:lnTo>
+                    <a:pt x="3151391" y="835314"/>
+                  </a:lnTo>
+                  <a:lnTo>
+                    <a:pt x="3223013" y="848336"/>
+                  </a:lnTo>
+                  <a:lnTo>
+                    <a:pt x="3294636" y="861153"/>
+                  </a:lnTo>
+                  <a:lnTo>
+                    <a:pt x="3366258" y="873768"/>
+                  </a:lnTo>
+                  <a:lnTo>
+                    <a:pt x="3437881" y="886185"/>
+                  </a:lnTo>
+                  <a:lnTo>
+                    <a:pt x="3509503" y="898407"/>
+                  </a:lnTo>
+                  <a:lnTo>
+                    <a:pt x="3581126" y="910436"/>
+                  </a:lnTo>
+                  <a:lnTo>
+                    <a:pt x="3652748" y="922276"/>
+                  </a:lnTo>
+                  <a:lnTo>
+                    <a:pt x="3724371" y="933930"/>
+                  </a:lnTo>
+                  <a:lnTo>
+                    <a:pt x="3795993" y="945400"/>
+                  </a:lnTo>
+                  <a:lnTo>
+                    <a:pt x="3867616" y="956690"/>
+                  </a:lnTo>
+                  <a:lnTo>
+                    <a:pt x="3939238" y="967803"/>
+                  </a:lnTo>
+                  <a:lnTo>
+                    <a:pt x="4010861" y="978740"/>
+                  </a:lnTo>
+                  <a:lnTo>
+                    <a:pt x="4082483" y="989506"/>
+                  </a:lnTo>
+                  <a:lnTo>
+                    <a:pt x="4154106" y="1000102"/>
+                  </a:lnTo>
+                  <a:lnTo>
+                    <a:pt x="4225729" y="1010531"/>
+                  </a:lnTo>
+                  <a:lnTo>
+                    <a:pt x="4297351" y="1020797"/>
+                  </a:lnTo>
+                  <a:lnTo>
+                    <a:pt x="4368974" y="1030900"/>
+                  </a:lnTo>
+                  <a:lnTo>
+                    <a:pt x="4440596" y="1040845"/>
+                  </a:lnTo>
+                  <a:lnTo>
+                    <a:pt x="4512219" y="1050634"/>
+                  </a:lnTo>
+                  <a:lnTo>
+                    <a:pt x="4583841" y="1060268"/>
+                  </a:lnTo>
+                  <a:lnTo>
+                    <a:pt x="4655464" y="1069751"/>
+                  </a:lnTo>
+                  <a:lnTo>
+                    <a:pt x="4727086" y="1079085"/>
+                  </a:lnTo>
+                  <a:lnTo>
+                    <a:pt x="4798709" y="1088272"/>
+                  </a:lnTo>
+                  <a:lnTo>
+                    <a:pt x="4870331" y="1097314"/>
+                  </a:lnTo>
+                  <a:lnTo>
+                    <a:pt x="4941954" y="1106214"/>
+                  </a:lnTo>
+                  <a:lnTo>
+                    <a:pt x="5013576" y="1114974"/>
+                  </a:lnTo>
+                  <a:lnTo>
+                    <a:pt x="5085199" y="1123596"/>
+                  </a:lnTo>
+                  <a:lnTo>
+                    <a:pt x="5156821" y="1132083"/>
+                  </a:lnTo>
+                  <a:lnTo>
+                    <a:pt x="5228444" y="1140436"/>
+                  </a:lnTo>
+                  <a:lnTo>
+                    <a:pt x="5300066" y="1148657"/>
+                  </a:lnTo>
+                  <a:lnTo>
+                    <a:pt x="5371689" y="1156750"/>
+                  </a:lnTo>
+                  <a:lnTo>
+                    <a:pt x="5443311" y="1164715"/>
+                  </a:lnTo>
+                  <a:lnTo>
+                    <a:pt x="5514934" y="1172554"/>
+                  </a:lnTo>
+                  <a:lnTo>
+                    <a:pt x="5586557" y="1180271"/>
+                  </a:lnTo>
+                  <a:lnTo>
+                    <a:pt x="5658179" y="1187866"/>
+                  </a:lnTo>
+                  <a:lnTo>
+                    <a:pt x="5729802" y="1195341"/>
+                  </a:lnTo>
+                  <a:lnTo>
+                    <a:pt x="5801424" y="1202699"/>
+                  </a:lnTo>
+                  <a:lnTo>
+                    <a:pt x="5873047" y="1209941"/>
+                  </a:lnTo>
+                  <a:lnTo>
+                    <a:pt x="5944669" y="1217069"/>
+                  </a:lnTo>
+                  <a:lnTo>
+                    <a:pt x="6016292" y="1224085"/>
+                  </a:lnTo>
+                  <a:lnTo>
+                    <a:pt x="6087914" y="1230991"/>
+                  </a:lnTo>
+                  <a:lnTo>
+                    <a:pt x="6159537" y="1237788"/>
+                  </a:lnTo>
+                  <a:lnTo>
+                    <a:pt x="6231159" y="1244478"/>
+                  </a:lnTo>
+                  <a:lnTo>
+                    <a:pt x="6302782" y="1251063"/>
+                  </a:lnTo>
+                  <a:lnTo>
+                    <a:pt x="6374404" y="1257544"/>
+                  </a:lnTo>
+                  <a:lnTo>
+                    <a:pt x="6446027" y="1263923"/>
+                  </a:lnTo>
+                  <a:lnTo>
+                    <a:pt x="6517649" y="1270202"/>
+                  </a:lnTo>
+                  <a:lnTo>
+                    <a:pt x="6589272" y="1276382"/>
+                  </a:lnTo>
+                  <a:lnTo>
+                    <a:pt x="6660894" y="1282465"/>
+                  </a:lnTo>
+                  <a:lnTo>
+                    <a:pt x="6732517" y="1288452"/>
+                  </a:lnTo>
+                  <a:lnTo>
+                    <a:pt x="6804139" y="1294345"/>
+                  </a:lnTo>
+                  <a:lnTo>
+                    <a:pt x="6875762" y="1300145"/>
+                  </a:lnTo>
+                  <a:lnTo>
+                    <a:pt x="6947385" y="1305854"/>
+                  </a:lnTo>
+                  <a:lnTo>
+                    <a:pt x="7019007" y="1311474"/>
+                  </a:lnTo>
+                  <a:lnTo>
+                    <a:pt x="7090630" y="1317004"/>
                   </a:lnTo>
                 </a:path>
               </a:pathLst>
@@ -4606,7 +4606,7 @@
           </p:nvSpPr>
           <p:spPr>
             <a:xfrm>
-              <a:off x="4313661" y="2073503"/>
+              <a:off x="4313914" y="2073503"/>
               <a:ext cx="0" cy="3649639"/>
             </a:xfrm>
             <a:custGeom>
@@ -4879,7 +4879,7 @@
           </p:nvSpPr>
           <p:spPr>
             <a:xfrm>
-              <a:off x="2280620" y="5785772"/>
+              <a:off x="2281218" y="5785772"/>
               <a:ext cx="161574" cy="80101"/>
             </a:xfrm>
             <a:prstGeom prst="rect">
@@ -4925,7 +4925,7 @@
           </p:nvSpPr>
           <p:spPr>
             <a:xfrm>
-              <a:off x="4204872" y="5785772"/>
+              <a:off x="4203472" y="5785772"/>
               <a:ext cx="62179" cy="80101"/>
             </a:xfrm>
             <a:prstGeom prst="rect">
@@ -4971,7 +4971,7 @@
           </p:nvSpPr>
           <p:spPr>
             <a:xfrm>
-              <a:off x="6048338" y="5785772"/>
+              <a:off x="6044938" y="5785772"/>
               <a:ext cx="124358" cy="80101"/>
             </a:xfrm>
             <a:prstGeom prst="rect">
@@ -5017,7 +5017,7 @@
           </p:nvSpPr>
           <p:spPr>
             <a:xfrm>
-              <a:off x="7922893" y="5785772"/>
+              <a:off x="7917494" y="5785772"/>
               <a:ext cx="124358" cy="80101"/>
             </a:xfrm>
             <a:prstGeom prst="rect">
@@ -5188,7 +5188,7 @@
                   <a:latin typeface="Helvetica"/>
                   <a:cs typeface="Helvetica"/>
                 </a:rPr>
-                <a:t>subHR per 10 % decline: 1.23 (0.88-1.73), p_Bonf = 1.000 (n = 6)  |  per IQR decline (Δ = 25.8 %): 1.72 (0.71-4.12)  |  IQR: [-10.7, 15.1] %</a:t>
+                <a:t>subHR per 10 % decline: 1.23 (0.88-1.73), p_Bonf = 1.000 (n = 6)  |  per IQR decline (Δ = 25.8 %): 1.71 (0.71-4.11)  |  IQR: [-10.6, 15.2] %</a:t>
               </a:r>
             </a:p>
           </p:txBody>
